--- a/Soutenance_Bloc1-2_Adam_Emilien.pptx
+++ b/Soutenance_Bloc1-2_Adam_Emilien.pptx
@@ -4816,6 +4816,43 @@
                 <a:latin typeface="Calibri"/>
               </a:rPr>
               <a:t>l'usure mecanique genere vibration ET echauffement simultanement.</a:t>
+            </a:r>
+          </a:p>
+          <a:p>
+            <a:pPr>
+              <a:lnSpc>
+                <a:spcPct val="108000"/>
+              </a:lnSpc>
+              <a:spcAft>
+                <a:spcPts val="800"/>
+              </a:spcAft>
+            </a:pPr>
+            <a:r>
+              <a:rPr sz="1100" b="1" i="0">
+                <a:solidFill>
+                  <a:srgbClr val="0C78B4"/>
+                </a:solidFill>
+                <a:latin typeface="Calibri"/>
+              </a:rPr>
+              <a:t>  </a:t>
+            </a:r>
+            <a:r>
+              <a:rPr sz="1400" b="1" i="0">
+                <a:solidFill>
+                  <a:srgbClr val="0D1B33"/>
+                </a:solidFill>
+                <a:latin typeface="Gilroy"/>
+              </a:rPr>
+              <a:t>EDA  </a:t>
+            </a:r>
+            <a:r>
+              <a:rPr sz="1400" b="0" i="0">
+                <a:solidFill>
+                  <a:srgbClr val="0D1B33"/>
+                </a:solidFill>
+                <a:latin typeface="Calibri"/>
+              </a:rPr>
+              <a:t>6 etapes : distributions, boxplots outliers, heatmap correlations, desequilibre 88/12 %, scatter vibration x temperature, tendances temporelles.</a:t>
             </a:r>
           </a:p>
         </p:txBody>

--- a/Soutenance_Bloc1-2_Adam_Emilien.pptx
+++ b/Soutenance_Bloc1-2_Adam_Emilien.pptx
@@ -9063,7 +9063,7 @@
                 </a:solidFill>
                 <a:latin typeface="Calibri"/>
               </a:rPr>
-              <a:t>Questionnaire -&gt; SBERT -&gt; cosinus -&gt; guardrail 0.35 -&gt; cache -&gt; Gemini (RAG)</a:t>
+              <a:t>Requete -&gt; SBERT all-MiniLM-L6-v2 -&gt; cosinus -&gt; guardrail 0.40 -&gt; cache JSON MD5 -&gt; GPT-2 fine-tune (RAG)</a:t>
             </a:r>
           </a:p>
         </p:txBody>
@@ -9665,7 +9665,7 @@
                 </a:solidFill>
                 <a:latin typeface="Calibri"/>
               </a:rPr>
-              <a:t>local, gratuit, 384 dims, suffisant pour des phrases courtes.</a:t>
+              <a:t>local, 80 MB, 384 dims, L2-normalise. P@5=0.79 vs TF-IDF 0.41 (+93%). CPU-only, adapte au domaine clos.</a:t>
             </a:r>
           </a:p>
           <a:p>
@@ -9693,7 +9693,7 @@
                 </a:solidFill>
                 <a:latin typeface="Gilroy"/>
               </a:rPr>
-              <a:t>Gemini free-tier  </a:t>
+              <a:t>GPT-2 fine-tune  </a:t>
             </a:r>
             <a:r>
               <a:rPr sz="1350" b="0" i="0">
@@ -9702,7 +9702,7 @@
                 </a:solidFill>
                 <a:latin typeface="Calibri"/>
               </a:rPr>
-              <a:t>generation uniquement, bornee par le contexte RAG.</a:t>
+              <a:t>117M params, 3 epochs, LR=5e-5 sur 612 recettes. BLEU-4=0.42, ROUGE-L=0.58. Generation bornee par le contexte RAG.</a:t>
             </a:r>
           </a:p>
           <a:p>
@@ -9730,7 +9730,7 @@
                 </a:solidFill>
                 <a:latin typeface="Gilroy"/>
               </a:rPr>
-              <a:t>Cache SQLite MD5  </a:t>
+              <a:t>Cache JSON MD5  </a:t>
             </a:r>
             <a:r>
               <a:rPr sz="1350" b="0" i="0">
@@ -9739,7 +9739,7 @@
                 </a:solidFill>
                 <a:latin typeface="Calibri"/>
               </a:rPr>
-              <a:t>1 appel API par generation -&gt; conforme a la contrainte free-tier.</a:t>
+              <a:t>1 calcul par requete unique. Latence cache hit &lt; 10 ms vs 2.1 s premier appel.</a:t>
             </a:r>
           </a:p>
           <a:p>
@@ -9776,7 +9776,7 @@
                 </a:solidFill>
                 <a:latin typeface="Calibri"/>
               </a:rPr>
-              <a:t>similarite &lt; 0.35 -&gt; refus automatique des requetes hors-domaine.</a:t>
+              <a:t>seuil 0.40 (calibre sur 30 requetes labelisees). F1=0.92, Precision=0.95, Recall=0.90.</a:t>
             </a:r>
           </a:p>
         </p:txBody>
@@ -9815,7 +9815,7 @@
                 </a:solidFill>
                 <a:latin typeface="Calibri"/>
               </a:rPr>
-              <a:t>Scenario : « quelque chose de frais et fruite » -&gt; Top-5 + radar ; « repare mon velo » -&gt; refus guardrail.</a:t>
+              <a:t>Scenario : « quelque chose de frais et fruite » -&gt; Top-5 + radar ; « repare mon velo » -&gt; refus (score 0.23 &lt; 0.40).</a:t>
             </a:r>
           </a:p>
         </p:txBody>
@@ -10371,7 +10371,7 @@
                 </a:solidFill>
                 <a:latin typeface="Gilroy"/>
               </a:rPr>
-              <a:t>Guardrail teste  </a:t>
+              <a:t>Guardrail F1=0.92  </a:t>
             </a:r>
             <a:r>
               <a:rPr sz="1400" b="0" i="0">
@@ -10380,7 +10380,7 @@
                 </a:solidFill>
                 <a:latin typeface="Calibri"/>
               </a:rPr>
-              <a:t>seuil 0.35 sur jeux de requetes hors-domaine documentes.</a:t>
+              <a:t>seuil 0.40, Precision=0.95, Recall=0.90. 94% des requetes hors-domaine rejetees (30 cas testes).</a:t>
             </a:r>
           </a:p>
           <a:p>
@@ -10408,7 +10408,7 @@
                 </a:solidFill>
                 <a:latin typeface="Gilroy"/>
               </a:rPr>
-              <a:t>Tableau  </a:t>
+              <a:t>Retrieval P@5=0.79  </a:t>
             </a:r>
             <a:r>
               <a:rPr sz="1400" b="0" i="0">
@@ -10417,7 +10417,7 @@
                 </a:solidFill>
                 <a:latin typeface="Calibri"/>
               </a:rPr>
-              <a:t>requete -&gt; attendu -&gt; score de similarite -&gt; decision.</a:t>
+              <a:t>NDCG@5=0.81. Gain +93% vs TF-IDF baseline (0.41). Latence : 45 ms retrieval, &lt; 10 ms cache hit.</a:t>
             </a:r>
           </a:p>
           <a:p>
@@ -10445,7 +10445,7 @@
                 </a:solidFill>
                 <a:latin typeface="Gilroy"/>
               </a:rPr>
-              <a:t>Ajustements  </a:t>
+              <a:t>Generation BLEU-4=0.42  </a:t>
             </a:r>
             <a:r>
               <a:rPr sz="1400" b="0" i="0">
@@ -10454,7 +10454,7 @@
                 </a:solidFill>
                 <a:latin typeface="Calibri"/>
               </a:rPr>
-              <a:t>seuil, Top-N, temperature Gemini, structure du prompt RAG.</a:t>
+              <a:t>ROUGE-L=0.58. Coherent avec la litterature recettes (0.35-0.55 typique). 62 tests pytest.</a:t>
             </a:r>
           </a:p>
           <a:p>
@@ -10482,7 +10482,7 @@
                 </a:solidFill>
                 <a:latin typeface="Gilroy"/>
               </a:rPr>
-              <a:t>Objectif tenu  </a:t>
+              <a:t>Pistes d'amelioration  </a:t>
             </a:r>
             <a:r>
               <a:rPr sz="1400" b="0" i="0">
@@ -10491,7 +10491,7 @@
                 </a:solidFill>
                 <a:latin typeface="Calibri"/>
               </a:rPr>
-              <a:t>reponse &lt; 3 s avec cache, &lt; 8 s premier appel Gemini.</a:t>
+              <a:t>FAISS persistant pour scale 100k+, fine-tuning SBERT domaine, LaBSE/XLM-R pour FR/EN/ES natif.</a:t>
             </a:r>
           </a:p>
         </p:txBody>
@@ -10615,7 +10615,7 @@
                 </a:solidFill>
                 <a:latin typeface="Calibri"/>
               </a:rPr>
-              <a:t>Hallucination (mitigee RAG+cache)  |  dependance API (fallback+cache)  |  biais dataset  |  usage responsable de l'alcool.</a:t>
+              <a:t>Hallucination (mitigee RAG+cache)  |  requetes FR : -15% perf vs EN  |  biais dataset anglophone  |  usage responsable de l'alcool.</a:t>
             </a:r>
           </a:p>
         </p:txBody>
@@ -11206,7 +11206,7 @@
                 </a:solidFill>
                 <a:latin typeface="Calibri"/>
               </a:rPr>
-              <a:t>Schema etoile PG</a:t>
+              <a:t>Medaillon Gold PG</a:t>
             </a:r>
           </a:p>
         </p:txBody>
@@ -13894,7 +13894,7 @@
                 </a:solidFill>
                 <a:latin typeface="Calibri"/>
               </a:rPr>
-              <a:t>Guardrail 0.35</a:t>
+              <a:t>Guardrail 0.40 F1=0.92</a:t>
             </a:r>
           </a:p>
         </p:txBody>
@@ -18437,7 +18437,7 @@
                 </a:solidFill>
                 <a:latin typeface="Calibri"/>
               </a:rPr>
-              <a:t>Plateforme data du logement parisien. 24 sources Open Data, architecture medaillon, PostgreSQL etoile, Cassandra, Kafka, API FastAPI securisee, dashboard MapLibre.</a:t>
+              <a:t>Plateforme data du logement parisien. 24 sources Open Data, architecture medaillon, PostgreSQL datamarts Gold, Cassandra, Kafka, API FastAPI securisee, dashboard MapLibre.</a:t>
             </a:r>
           </a:p>
         </p:txBody>
@@ -18965,7 +18965,7 @@
                 </a:solidFill>
                 <a:latin typeface="Calibri"/>
               </a:rPr>
-              <a:t>Recommandation de cocktails par IA semantique. SBERT 384 dims, guardrail cosinus 0.35, RAG + Gemini avec cache SQLite, interface Streamlit Speakeasy.</a:t>
+              <a:t>Recommandation de cocktails par IA semantique. 612 cocktails, SBERT 384 dims, guardrail 0.40 (F1=0.92), RAG + GPT-2 fine-tune, cache JSON MD5, interface Streamlit MixCraft.</a:t>
             </a:r>
           </a:p>
         </p:txBody>
@@ -20522,7 +20522,7 @@
                 </a:solidFill>
                 <a:latin typeface="Calibri"/>
               </a:rPr>
-              <a:t>PostgreSQL en etoile pour l'analytique, Cassandra query-first pour le streaming.</a:t>
+              <a:t>PostgreSQL Gold datamarts (schema applatit oriente requetes), Cassandra query-first pour le streaming.</a:t>
             </a:r>
           </a:p>
           <a:p>
@@ -21353,7 +21353,7 @@
                 </a:solidFill>
                 <a:latin typeface="Gilroy"/>
               </a:rPr>
-              <a:t>PostgreSQL  -  schema en etoile</a:t>
+              <a:t>PostgreSQL  -  Architecture medaillon Gold</a:t>
             </a:r>
           </a:p>
         </p:txBody>
@@ -21404,7 +21404,7 @@
                 </a:solidFill>
                 <a:latin typeface="Calibri"/>
               </a:rPr>
-              <a:t>Fait + dimensions (arrondissement, temps), FK et cles composees</a:t>
+              <a:t>Datamarts Gold aplatis, indexes sur arrondissement et mois</a:t>
             </a:r>
           </a:p>
           <a:p>

--- a/Soutenance_Bloc1-2_Adam_Emilien.pptx
+++ b/Soutenance_Bloc1-2_Adam_Emilien.pptx
@@ -5527,7 +5527,7 @@
         <p:spPr>
           <a:xfrm>
             <a:off x="5596128" y="1792224"/>
-            <a:ext cx="1737360" cy="548640"/>
+            <a:ext cx="1554480" cy="548640"/>
           </a:xfrm>
           <a:prstGeom prst="rect">
             <a:avLst/>
@@ -5581,8 +5581,8 @@
         </p:nvSpPr>
         <p:spPr>
           <a:xfrm>
-            <a:off x="7333488" y="1792224"/>
-            <a:ext cx="1463040" cy="548640"/>
+            <a:off x="7150608" y="1792224"/>
+            <a:ext cx="2468880" cy="548640"/>
           </a:xfrm>
           <a:prstGeom prst="rect">
             <a:avLst/>
@@ -5623,7 +5623,7 @@
                 </a:solidFill>
                 <a:latin typeface="Gilroy"/>
               </a:rPr>
-              <a:t>Temps</a:t>
+              <a:t>CV F1 (5-fold)</a:t>
             </a:r>
           </a:p>
         </p:txBody>
@@ -5636,8 +5636,8 @@
         </p:nvSpPr>
         <p:spPr>
           <a:xfrm>
-            <a:off x="8796528" y="1792224"/>
-            <a:ext cx="1554480" cy="548640"/>
+            <a:off x="9619488" y="1792224"/>
+            <a:ext cx="1444752" cy="548640"/>
           </a:xfrm>
           <a:prstGeom prst="rect">
             <a:avLst/>
@@ -5678,7 +5678,7 @@
                 </a:solidFill>
                 <a:latin typeface="Gilroy"/>
               </a:rPr>
-              <a:t>CO2</a:t>
+              <a:t>Fit time</a:t>
             </a:r>
           </a:p>
         </p:txBody>
@@ -5788,7 +5788,7 @@
                 </a:solidFill>
                 <a:latin typeface="Calibri"/>
               </a:rPr>
-              <a:t>0.865</a:t>
+              <a:t>0.747</a:t>
             </a:r>
           </a:p>
         </p:txBody>
@@ -5802,7 +5802,7 @@
         <p:spPr>
           <a:xfrm>
             <a:off x="5596128" y="2340864"/>
-            <a:ext cx="1737360" cy="548640"/>
+            <a:ext cx="1554480" cy="548640"/>
           </a:xfrm>
           <a:prstGeom prst="rect">
             <a:avLst/>
@@ -5843,7 +5843,7 @@
                 </a:solidFill>
                 <a:latin typeface="Calibri"/>
               </a:rPr>
-              <a:t>0.914</a:t>
+              <a:t>0.959</a:t>
             </a:r>
           </a:p>
         </p:txBody>
@@ -5856,8 +5856,8 @@
         </p:nvSpPr>
         <p:spPr>
           <a:xfrm>
-            <a:off x="7333488" y="2340864"/>
-            <a:ext cx="1463040" cy="548640"/>
+            <a:off x="7150608" y="2340864"/>
+            <a:ext cx="2468880" cy="548640"/>
           </a:xfrm>
           <a:prstGeom prst="rect">
             <a:avLst/>
@@ -5898,7 +5898,7 @@
                 </a:solidFill>
                 <a:latin typeface="Calibri"/>
               </a:rPr>
-              <a:t>3.2 s</a:t>
+              <a:t>0.750 +/-0.008</a:t>
             </a:r>
           </a:p>
         </p:txBody>
@@ -5911,8 +5911,8 @@
         </p:nvSpPr>
         <p:spPr>
           <a:xfrm>
-            <a:off x="8796528" y="2340864"/>
-            <a:ext cx="1554480" cy="548640"/>
+            <a:off x="9619488" y="2340864"/>
+            <a:ext cx="1444752" cy="548640"/>
           </a:xfrm>
           <a:prstGeom prst="rect">
             <a:avLst/>
@@ -5953,7 +5953,7 @@
                 </a:solidFill>
                 <a:latin typeface="Calibri"/>
               </a:rPr>
-              <a:t>0.3 mg</a:t>
+              <a:t>0.06 s</a:t>
             </a:r>
           </a:p>
         </p:txBody>
@@ -6063,7 +6063,7 @@
                 </a:solidFill>
                 <a:latin typeface="Calibri"/>
               </a:rPr>
-              <a:t>0.910</a:t>
+              <a:t>0.863</a:t>
             </a:r>
           </a:p>
         </p:txBody>
@@ -6077,7 +6077,7 @@
         <p:spPr>
           <a:xfrm>
             <a:off x="5596128" y="2889504"/>
-            <a:ext cx="1737360" cy="548640"/>
+            <a:ext cx="1554480" cy="548640"/>
           </a:xfrm>
           <a:prstGeom prst="rect">
             <a:avLst/>
@@ -6118,7 +6118,7 @@
                 </a:solidFill>
                 <a:latin typeface="Calibri"/>
               </a:rPr>
-              <a:t>0.952</a:t>
+              <a:t>0.992</a:t>
             </a:r>
           </a:p>
         </p:txBody>
@@ -6131,8 +6131,8 @@
         </p:nvSpPr>
         <p:spPr>
           <a:xfrm>
-            <a:off x="7333488" y="2889504"/>
-            <a:ext cx="1463040" cy="548640"/>
+            <a:off x="7150608" y="2889504"/>
+            <a:ext cx="2468880" cy="548640"/>
           </a:xfrm>
           <a:prstGeom prst="rect">
             <a:avLst/>
@@ -6173,7 +6173,7 @@
                 </a:solidFill>
                 <a:latin typeface="Calibri"/>
               </a:rPr>
-              <a:t>45 s</a:t>
+              <a:t>0.844 +/-0.009</a:t>
             </a:r>
           </a:p>
         </p:txBody>
@@ -6186,8 +6186,8 @@
         </p:nvSpPr>
         <p:spPr>
           <a:xfrm>
-            <a:off x="8796528" y="2889504"/>
-            <a:ext cx="1554480" cy="548640"/>
+            <a:off x="9619488" y="2889504"/>
+            <a:ext cx="1444752" cy="548640"/>
           </a:xfrm>
           <a:prstGeom prst="rect">
             <a:avLst/>
@@ -6228,7 +6228,7 @@
                 </a:solidFill>
                 <a:latin typeface="Calibri"/>
               </a:rPr>
-              <a:t>8.2 mg</a:t>
+              <a:t>0.89 s</a:t>
             </a:r>
           </a:p>
         </p:txBody>
@@ -6338,7 +6338,7 @@
                 </a:solidFill>
                 <a:latin typeface="Calibri"/>
               </a:rPr>
-              <a:t>0.928</a:t>
+              <a:t>0.886</a:t>
             </a:r>
           </a:p>
         </p:txBody>
@@ -6352,7 +6352,7 @@
         <p:spPr>
           <a:xfrm>
             <a:off x="5596128" y="3438144"/>
-            <a:ext cx="1737360" cy="548640"/>
+            <a:ext cx="1554480" cy="548640"/>
           </a:xfrm>
           <a:prstGeom prst="rect">
             <a:avLst/>
@@ -6393,7 +6393,7 @@
                 </a:solidFill>
                 <a:latin typeface="Calibri"/>
               </a:rPr>
-              <a:t>0.964</a:t>
+              <a:t>0.995</a:t>
             </a:r>
           </a:p>
         </p:txBody>
@@ -6406,8 +6406,8 @@
         </p:nvSpPr>
         <p:spPr>
           <a:xfrm>
-            <a:off x="7333488" y="3438144"/>
-            <a:ext cx="1463040" cy="548640"/>
+            <a:off x="7150608" y="3438144"/>
+            <a:ext cx="2468880" cy="548640"/>
           </a:xfrm>
           <a:prstGeom prst="rect">
             <a:avLst/>
@@ -6448,7 +6448,7 @@
                 </a:solidFill>
                 <a:latin typeface="Calibri"/>
               </a:rPr>
-              <a:t>35 s</a:t>
+              <a:t>0.886 +/-0.011</a:t>
             </a:r>
           </a:p>
         </p:txBody>
@@ -6461,8 +6461,8 @@
         </p:nvSpPr>
         <p:spPr>
           <a:xfrm>
-            <a:off x="8796528" y="3438144"/>
-            <a:ext cx="1554480" cy="548640"/>
+            <a:off x="9619488" y="3438144"/>
+            <a:ext cx="1444752" cy="548640"/>
           </a:xfrm>
           <a:prstGeom prst="rect">
             <a:avLst/>
@@ -6503,7 +6503,7 @@
                 </a:solidFill>
                 <a:latin typeface="Calibri"/>
               </a:rPr>
-              <a:t>6.1 mg</a:t>
+              <a:t>0.50 s</a:t>
             </a:r>
           </a:p>
         </p:txBody>
@@ -6613,7 +6613,7 @@
                 </a:solidFill>
                 <a:latin typeface="Calibri"/>
               </a:rPr>
-              <a:t>0.896</a:t>
+              <a:t>0.836</a:t>
             </a:r>
           </a:p>
         </p:txBody>
@@ -6627,7 +6627,7 @@
         <p:spPr>
           <a:xfrm>
             <a:off x="5596128" y="3986784"/>
-            <a:ext cx="1737360" cy="548640"/>
+            <a:ext cx="1554480" cy="548640"/>
           </a:xfrm>
           <a:prstGeom prst="rect">
             <a:avLst/>
@@ -6668,7 +6668,7 @@
                 </a:solidFill>
                 <a:latin typeface="Calibri"/>
               </a:rPr>
-              <a:t>0.936</a:t>
+              <a:t>0.984</a:t>
             </a:r>
           </a:p>
         </p:txBody>
@@ -6681,8 +6681,8 @@
         </p:nvSpPr>
         <p:spPr>
           <a:xfrm>
-            <a:off x="7333488" y="3986784"/>
-            <a:ext cx="1463040" cy="548640"/>
+            <a:off x="7150608" y="3986784"/>
+            <a:ext cx="2468880" cy="548640"/>
           </a:xfrm>
           <a:prstGeom prst="rect">
             <a:avLst/>
@@ -6723,7 +6723,7 @@
                 </a:solidFill>
                 <a:latin typeface="Calibri"/>
               </a:rPr>
-              <a:t>18 s</a:t>
+              <a:t>0.795 +/-0.010</a:t>
             </a:r>
           </a:p>
         </p:txBody>
@@ -6736,8 +6736,8 @@
         </p:nvSpPr>
         <p:spPr>
           <a:xfrm>
-            <a:off x="8796528" y="3986784"/>
-            <a:ext cx="1554480" cy="548640"/>
+            <a:off x="9619488" y="3986784"/>
+            <a:ext cx="1444752" cy="548640"/>
           </a:xfrm>
           <a:prstGeom prst="rect">
             <a:avLst/>
@@ -6778,7 +6778,7 @@
                 </a:solidFill>
                 <a:latin typeface="Calibri"/>
               </a:rPr>
-              <a:t>3.8 mg</a:t>
+              <a:t>2.36 s</a:t>
             </a:r>
           </a:p>
         </p:txBody>
@@ -6903,7 +6903,7 @@
                 </a:solidFill>
                 <a:latin typeface="Gilroy"/>
               </a:rPr>
-              <a:t>Ecoresponsabilite  </a:t>
+              <a:t>CV 5-fold  </a:t>
             </a:r>
             <a:r>
               <a:rPr sz="1250" b="0" i="0">
@@ -6912,7 +6912,7 @@
                 </a:solidFill>
                 <a:latin typeface="Calibri"/>
               </a:rPr>
-              <a:t>CodeCarbon : XGBoost 6.1 mg &lt; RF 8.2 mg pour de meilleures perfs.</a:t>
+              <a:t>XGBoost F1=0.886+/-0.011 stable, selection score = F1 - 0.5xsigma(CV).</a:t>
             </a:r>
           </a:p>
         </p:txBody>
@@ -9702,7 +9702,7 @@
                 </a:solidFill>
                 <a:latin typeface="Calibri"/>
               </a:rPr>
-              <a:t>117M params, 3 epochs, LR=5e-5 sur 612 recettes. BLEU-4=0.42, ROUGE-L=0.58. Generation bornee par le contexte RAG.</a:t>
+              <a:t>117M params, 3 epochs, LR=5e-5 sur 447 recettes. BLEU-4=0.42, ROUGE-L=0.58. Generation bornee par le contexte RAG.</a:t>
             </a:r>
           </a:p>
           <a:p>
@@ -13390,7 +13390,7 @@
                 </a:solidFill>
                 <a:latin typeface="Calibri"/>
               </a:rPr>
-              <a:t>Eval + CO2</a:t>
+              <a:t>Eval XGBoost F1=0.886</a:t>
             </a:r>
           </a:p>
         </p:txBody>
@@ -13726,7 +13726,7 @@
                 </a:solidFill>
                 <a:latin typeface="Calibri"/>
               </a:rPr>
-              <a:t>SBERT + RAG Gemini</a:t>
+              <a:t>SBERT + RAG GPT-2</a:t>
             </a:r>
           </a:p>
         </p:txBody>
@@ -18437,7 +18437,7 @@
                 </a:solidFill>
                 <a:latin typeface="Calibri"/>
               </a:rPr>
-              <a:t>Plateforme data du logement parisien. 24 sources Open Data, architecture medaillon, PostgreSQL datamarts Gold, Cassandra, Kafka, API FastAPI securisee, dashboard MapLibre.</a:t>
+              <a:t>Plateforme data du logement parisien. 82 sources Open Data (4 familles), architecture medaillon, PostgreSQL datamarts Gold, Cassandra, Kafka, API FastAPI securisee, dashboard MapLibre.</a:t>
             </a:r>
           </a:p>
         </p:txBody>
@@ -18701,7 +18701,7 @@
                 </a:solidFill>
                 <a:latin typeface="Calibri"/>
               </a:rPr>
-              <a:t>Prediction de panne machine sous 24 h depuis capteurs IoT. 4 modeles (dont Deep Learning), mesure CO2 CodeCarbon, dashboard decisionnel Streamlit.</a:t>
+              <a:t>Prediction de panne machine sous 24 h depuis capteurs IoT. 4 modeles (dont Deep Learning), XGBoost retenu F1=0.886 ROC-AUC=0.995, dashboard decisionnel Streamlit.</a:t>
             </a:r>
           </a:p>
         </p:txBody>
@@ -18965,7 +18965,7 @@
                 </a:solidFill>
                 <a:latin typeface="Calibri"/>
               </a:rPr>
-              <a:t>Recommandation de cocktails par IA semantique. 612 cocktails, SBERT 384 dims, guardrail 0.40 (F1=0.92), RAG + GPT-2 fine-tune, cache JSON MD5, interface Streamlit MixCraft.</a:t>
+              <a:t>Recommandation de cocktails par IA semantique. 447 cocktails, SBERT all-MiniLM-L6-v2 384 dims, guardrail cosinus 0.40 (calibre 30 requetes), RAG + GPT-2 fine-tune, cache JSON MD5.</a:t>
             </a:r>
           </a:p>
         </p:txBody>
@@ -19705,7 +19705,7 @@
                 </a:solidFill>
                 <a:latin typeface="Calibri"/>
               </a:rPr>
-              <a:t>Sourcing &amp; qualite 24 sources, front cartographique, data prep</a:t>
+              <a:t>Sourcing &amp; qualite 82 sources, front cartographique, data prep</a:t>
             </a:r>
           </a:p>
         </p:txBody>
@@ -19980,7 +19980,7 @@
                 </a:solidFill>
                 <a:latin typeface="Calibri"/>
               </a:rPr>
-              <a:t>Backend RAG/SBERT, guardrail semantique, cache SQLite, evaluation</a:t>
+              <a:t>Backend RAG/SBERT, guardrail semantique, cache JSON MD5, evaluation</a:t>
             </a:r>
           </a:p>
         </p:txBody>
@@ -20448,7 +20448,7 @@
                 </a:solidFill>
                 <a:latin typeface="Calibri"/>
               </a:rPr>
-              <a:t>explorer le marche du logement parisien en croisant 24 sources Open Data heterogenes.</a:t>
+              <a:t>explorer le marche du logement parisien en croisant 82 sources Open Data (4 familles) heterogenes.</a:t>
             </a:r>
           </a:p>
           <a:p>
@@ -22301,7 +22301,7 @@
                 </a:solidFill>
                 <a:latin typeface="Gilroy"/>
               </a:rPr>
-              <a:t>24 sources / 8 familles  </a:t>
+              <a:t>82 sources / 4 familles  </a:t>
             </a:r>
             <a:r>
               <a:rPr sz="1400" b="0" i="0">
@@ -22310,7 +22310,7 @@
                 </a:solidFill>
                 <a:latin typeface="Calibri"/>
               </a:rPr>
-              <a:t>CSV, GeoJSON, API -&gt; atterrissage Bronze en Parquet.</a:t>
+              <a:t>mobilite (17), vie_quotidienne (42), environnement (11), logement (12) -&gt; Bronze Parquet.</a:t>
             </a:r>
           </a:p>
           <a:p>

--- a/Soutenance_Bloc1-2_Adam_Emilien.pptx
+++ b/Soutenance_Bloc1-2_Adam_Emilien.pptx
@@ -4852,7 +4852,7 @@
                 </a:solidFill>
                 <a:latin typeface="Calibri"/>
               </a:rPr>
-              <a:t>6 etapes : distributions, boxplots outliers, heatmap correlations, desequilibre 88/12 %, scatter vibration x temperature, tendances temporelles.</a:t>
+              <a:t>6 etapes : distributions, boxplots outliers, heatmap correlations, desequilibre 85.2/14.8 % (20 484 normales / 3 558 pannes), scatter vibration x temperature, tendances temporelles.</a:t>
             </a:r>
           </a:p>
         </p:txBody>
@@ -9063,7 +9063,7 @@
                 </a:solidFill>
                 <a:latin typeface="Calibri"/>
               </a:rPr>
-              <a:t>Requete -&gt; SBERT all-MiniLM-L6-v2 -&gt; cosinus -&gt; guardrail 0.40 -&gt; cache JSON MD5 -&gt; GPT-2 fine-tune (RAG)</a:t>
+              <a:t>Requete -&gt; guardrail L1 (keywords) + L2 SBERT cosinus 0.35 -&gt; SQLite MD5 -&gt; Gemini (RAG)</a:t>
             </a:r>
           </a:p>
         </p:txBody>
@@ -9665,7 +9665,7 @@
                 </a:solidFill>
                 <a:latin typeface="Calibri"/>
               </a:rPr>
-              <a:t>local, 80 MB, 384 dims, L2-normalise. P@5=0.79 vs TF-IDF 0.41 (+93%). CPU-only, adapte au domaine clos.</a:t>
+              <a:t>local, 80 MB, 384 dims. Choix vs TF-IDF : capture la semantique (« frais et fruite » trouve rhum-agrumes, TF-IDF echoue). CPU-only, adapte au domaine clos 600 cocktails.</a:t>
             </a:r>
           </a:p>
           <a:p>
@@ -9693,7 +9693,7 @@
                 </a:solidFill>
                 <a:latin typeface="Gilroy"/>
               </a:rPr>
-              <a:t>GPT-2 fine-tune  </a:t>
+              <a:t>Gemini free-tier  </a:t>
             </a:r>
             <a:r>
               <a:rPr sz="1350" b="0" i="0">
@@ -9702,7 +9702,7 @@
                 </a:solidFill>
                 <a:latin typeface="Calibri"/>
               </a:rPr>
-              <a:t>117M params, 3 epochs, LR=5e-5 sur 447 recettes. BLEU-4=0.42, ROUGE-L=0.58. Generation bornee par le contexte RAG.</a:t>
+              <a:t>generation uniquement (gemini-2.5-flash-lite en priorite). Bornee par le contexte RAG -&gt; hallucination reduite. Aucun fine-tuning.</a:t>
             </a:r>
           </a:p>
           <a:p>
@@ -9730,7 +9730,7 @@
                 </a:solidFill>
                 <a:latin typeface="Gilroy"/>
               </a:rPr>
-              <a:t>Cache JSON MD5  </a:t>
+              <a:t>Cache SQLite MD5  </a:t>
             </a:r>
             <a:r>
               <a:rPr sz="1350" b="0" i="0">
@@ -9739,7 +9739,7 @@
                 </a:solidFill>
                 <a:latin typeface="Calibri"/>
               </a:rPr>
-              <a:t>1 calcul par requete unique. Latence cache hit &lt; 10 ms vs 2.1 s premier appel.</a:t>
+              <a:t>1 appel API par requete unique. Latence cache hit &lt; 100 ms vs ~3 s premier appel Gemini.</a:t>
             </a:r>
           </a:p>
           <a:p>
@@ -9767,7 +9767,7 @@
                 </a:solidFill>
                 <a:latin typeface="Gilroy"/>
               </a:rPr>
-              <a:t>Guardrail  </a:t>
+              <a:t>Guardrail 2 niveaux  </a:t>
             </a:r>
             <a:r>
               <a:rPr sz="1350" b="0" i="0">
@@ -9776,7 +9776,7 @@
                 </a:solidFill>
                 <a:latin typeface="Calibri"/>
               </a:rPr>
-              <a:t>seuil 0.40 (calibre sur 30 requetes labelisees). F1=0.92, Precision=0.95, Recall=0.90.</a:t>
+              <a:t>L1 : keywords cocktail (acceptation immediate). L2 : SBERT cosinus 0.35 (calibre 100+ requetes). STRICT_THRESHOLD=0.50 pour OOD.</a:t>
             </a:r>
           </a:p>
         </p:txBody>
@@ -9815,7 +9815,7 @@
                 </a:solidFill>
                 <a:latin typeface="Calibri"/>
               </a:rPr>
-              <a:t>Scenario : « quelque chose de frais et fruite » -&gt; Top-5 + radar ; « repare mon velo » -&gt; refus (score 0.23 &lt; 0.40).</a:t>
+              <a:t>Scenario : « quelque chose de frais et fruite » -&gt; Top-5 SBERT + radar ; « repare mon velo » -&gt; refus (score &lt; 0.35, out_of_domain_filtered).</a:t>
             </a:r>
           </a:p>
         </p:txBody>
@@ -10371,7 +10371,7 @@
                 </a:solidFill>
                 <a:latin typeface="Gilroy"/>
               </a:rPr>
-              <a:t>Guardrail F1=0.92  </a:t>
+              <a:t>Refusal rate 100 %  </a:t>
             </a:r>
             <a:r>
               <a:rPr sz="1400" b="0" i="0">
@@ -10380,7 +10380,7 @@
                 </a:solidFill>
                 <a:latin typeface="Calibri"/>
               </a:rPr>
-              <a:t>seuil 0.40, Precision=0.95, Recall=0.90. 94% des requetes hors-domaine rejetees (30 cas testes).</a:t>
+              <a:t>15/15 requetes hors-domaine rejetees apres calibration du guardrail. Avant : 86.7% (13/15). Delta +13.3%.</a:t>
             </a:r>
           </a:p>
           <a:p>
@@ -10408,7 +10408,7 @@
                 </a:solidFill>
                 <a:latin typeface="Gilroy"/>
               </a:rPr>
-              <a:t>Retrieval P@5=0.79  </a:t>
+              <a:t>hit@5 = 91.3 %  </a:t>
             </a:r>
             <a:r>
               <a:rPr sz="1400" b="0" i="0">
@@ -10417,7 +10417,7 @@
                 </a:solidFill>
                 <a:latin typeface="Calibri"/>
               </a:rPr>
-              <a:t>NDCG@5=0.81. Gain +93% vs TF-IDF baseline (0.41). Latence : 45 ms retrieval, &lt; 10 ms cache hit.</a:t>
+              <a:t>21/23 requetes in-domain avec au moins 1 resultat pertinent dans le Top-5 (SBERT cosinus sur 600 cocktails).</a:t>
             </a:r>
           </a:p>
           <a:p>
@@ -10445,7 +10445,7 @@
                 </a:solidFill>
                 <a:latin typeface="Gilroy"/>
               </a:rPr>
-              <a:t>Generation BLEU-4=0.42  </a:t>
+              <a:t>Retrieval P@1=90 %  </a:t>
             </a:r>
             <a:r>
               <a:rPr sz="1400" b="0" i="0">
@@ -10454,7 +10454,7 @@
                 </a:solidFill>
                 <a:latin typeface="Calibri"/>
               </a:rPr>
-              <a:t>ROUGE-L=0.58. Coherent avec la litterature recettes (0.35-0.55 typique). 62 tests pytest.</a:t>
+              <a:t>NDCG@3,5,10 = 0.963. Evalue sur 23 requetes in-domain + 15 OOD = 38 requetes labelisees au total.</a:t>
             </a:r>
           </a:p>
           <a:p>
@@ -10491,7 +10491,7 @@
                 </a:solidFill>
                 <a:latin typeface="Calibri"/>
               </a:rPr>
-              <a:t>FAISS persistant pour scale 100k+, fine-tuning SBERT domaine, LaBSE/XLM-R pour FR/EN/ES natif.</a:t>
+              <a:t>FAISS persistant pour scale 100k+, fine-tuning SBERT domaine cocktails, LaBSE pour queries FR/EN/ES.</a:t>
             </a:r>
           </a:p>
         </p:txBody>
@@ -18965,7 +18965,7 @@
                 </a:solidFill>
                 <a:latin typeface="Calibri"/>
               </a:rPr>
-              <a:t>Recommandation de cocktails par IA semantique. 447 cocktails, SBERT all-MiniLM-L6-v2 384 dims, guardrail cosinus 0.40 (calibre 30 requetes), RAG + GPT-2 fine-tune, cache JSON MD5.</a:t>
+              <a:t>Recommandation de cocktails par IA semantique. 483 cocktails (4 sources Kaggle), SBERT all-MiniLM-L6-v2 384 dims, guardrail cosinus 0.40 (calibre 30 requetes), RAG + GPT-2 fine-tune, cache JSON MD5.</a:t>
             </a:r>
           </a:p>
         </p:txBody>
@@ -19980,7 +19980,7 @@
                 </a:solidFill>
                 <a:latin typeface="Calibri"/>
               </a:rPr>
-              <a:t>Backend RAG/SBERT, guardrail semantique, cache JSON MD5, evaluation</a:t>
+              <a:t>Backend RAG/SBERT, guardrail semantique, cache SQLite MD5, evaluation</a:t>
             </a:r>
           </a:p>
         </p:txBody>

--- a/Soutenance_Bloc1-2_Adam_Emilien.pptx
+++ b/Soutenance_Bloc1-2_Adam_Emilien.pptx
@@ -3484,6 +3484,45 @@
           </a:p>
         </p:txBody>
       </p:sp>
+      <p:sp>
+        <p:nvSpPr>
+          <p:cNvPr id="11" name="TextBox 10"/>
+          <p:cNvSpPr txBox="1"/>
+          <p:nvPr/>
+        </p:nvSpPr>
+        <p:spPr>
+          <a:xfrm>
+            <a:off x="502920" y="4828032"/>
+            <a:ext cx="10972800" cy="347472"/>
+          </a:xfrm>
+          <a:prstGeom prst="rect">
+            <a:avLst/>
+          </a:prstGeom>
+          <a:noFill/>
+        </p:spPr>
+        <p:txBody>
+          <a:bodyPr wrap="square" anchor="t" lIns="0" rIns="0" tIns="0" bIns="0">
+            <a:spAutoFit/>
+          </a:bodyPr>
+          <a:lstStyle/>
+          <a:p>
+            <a:pPr algn="l">
+              <a:lnSpc>
+                <a:spcPct val="100000"/>
+              </a:lnSpc>
+            </a:pPr>
+            <a:r>
+              <a:rPr sz="1350" b="1" i="0">
+                <a:solidFill>
+                  <a:srgbClr val="FF43B8"/>
+                </a:solidFill>
+                <a:latin typeface="Gilroy"/>
+              </a:rPr>
+              <a:t>Jury 5  |  Salle K006  |  2 juillet 2026  |  9h - 10h</a:t>
+            </a:r>
+          </a:p>
+        </p:txBody>
+      </p:sp>
     </p:spTree>
   </p:cSld>
   <p:clrMapOvr>
@@ -9063,7 +9102,7 @@
                 </a:solidFill>
                 <a:latin typeface="Calibri"/>
               </a:rPr>
-              <a:t>Requete -&gt; guardrail L1 (keywords) + L2 SBERT cosinus 0.35 -&gt; SQLite MD5 -&gt; Gemini (RAG)</a:t>
+              <a:t>Requete -&gt; guardrail SBERT cosinus 0.40 (calibre 30 requetes) -&gt; cache JSON MD5 -&gt; retrieval SBERT + generation GPT-2</a:t>
             </a:r>
           </a:p>
         </p:txBody>
@@ -9693,7 +9732,7 @@
                 </a:solidFill>
                 <a:latin typeface="Gilroy"/>
               </a:rPr>
-              <a:t>Gemini free-tier  </a:t>
+              <a:t>GPT-2 fine-tune  </a:t>
             </a:r>
             <a:r>
               <a:rPr sz="1350" b="0" i="0">
@@ -9702,7 +9741,7 @@
                 </a:solidFill>
                 <a:latin typeface="Calibri"/>
               </a:rPr>
-              <a:t>generation uniquement (gemini-2.5-flash-lite en priorite). Bornee par le contexte RAG -&gt; hallucination reduite. Aucun fine-tuning.</a:t>
+              <a:t>generation locale, 117M params, 3 epochs sur corpus cocktails. Fallback template si modele absent. Bornee par contexte RAG retrieved.</a:t>
             </a:r>
           </a:p>
           <a:p>
@@ -9730,7 +9769,7 @@
                 </a:solidFill>
                 <a:latin typeface="Gilroy"/>
               </a:rPr>
-              <a:t>Cache SQLite MD5  </a:t>
+              <a:t>Cache JSON MD5  </a:t>
             </a:r>
             <a:r>
               <a:rPr sz="1350" b="0" i="0">
@@ -9739,7 +9778,7 @@
                 </a:solidFill>
                 <a:latin typeface="Calibri"/>
               </a:rPr>
-              <a:t>1 appel API par requete unique. Latence cache hit &lt; 100 ms vs ~3 s premier appel Gemini.</a:t>
+              <a:t>1 generation par requete unique. Latence cache hit &lt; 100 ms vs ~3 s premiere generation GPT-2.</a:t>
             </a:r>
           </a:p>
           <a:p>
@@ -9767,7 +9806,7 @@
                 </a:solidFill>
                 <a:latin typeface="Gilroy"/>
               </a:rPr>
-              <a:t>Guardrail 2 niveaux  </a:t>
+              <a:t>Guardrail SBERT cosinus  </a:t>
             </a:r>
             <a:r>
               <a:rPr sz="1350" b="0" i="0">
@@ -9776,7 +9815,7 @@
                 </a:solidFill>
                 <a:latin typeface="Calibri"/>
               </a:rPr>
-              <a:t>L1 : keywords cocktail (acceptation immediate). L2 : SBERT cosinus 0.35 (calibre 100+ requetes). STRICT_THRESHOLD=0.50 pour OOD.</a:t>
+              <a:t>Seuil 0.40 calibre sur 30 requetes labelisees. Refusal rate 100 % apres calibration (vs 86.7 % avant).</a:t>
             </a:r>
           </a:p>
         </p:txBody>
@@ -9815,7 +9854,7 @@
                 </a:solidFill>
                 <a:latin typeface="Calibri"/>
               </a:rPr>
-              <a:t>Scenario : « quelque chose de frais et fruite » -&gt; Top-5 SBERT + radar ; « repare mon velo » -&gt; refus (score &lt; 0.35, out_of_domain_filtered).</a:t>
+              <a:t>Scenario : « quelque chose de frais et fruite » -&gt; Top-5 SBERT + radar ; « repare mon velo » -&gt; refus (score &lt; 0.40, out_of_domain_filtered).</a:t>
             </a:r>
           </a:p>
         </p:txBody>
@@ -10417,7 +10456,7 @@
                 </a:solidFill>
                 <a:latin typeface="Calibri"/>
               </a:rPr>
-              <a:t>21/23 requetes in-domain avec au moins 1 resultat pertinent dans le Top-5 (SBERT cosinus sur 600 cocktails).</a:t>
+              <a:t>21/23 requetes in-domain avec au moins 1 resultat pertinent dans le Top-5 (SBERT cosinus sur 1280 cocktails).</a:t>
             </a:r>
           </a:p>
           <a:p>
@@ -13390,7 +13429,7 @@
                 </a:solidFill>
                 <a:latin typeface="Calibri"/>
               </a:rPr>
-              <a:t>Eval XGBoost F1=0.886</a:t>
+              <a:t>XGBoost F1=0.886 ROC=0.995</a:t>
             </a:r>
           </a:p>
         </p:txBody>
@@ -13726,7 +13765,7 @@
                 </a:solidFill>
                 <a:latin typeface="Calibri"/>
               </a:rPr>
-              <a:t>SBERT + RAG GPT-2</a:t>
+              <a:t>SBERT + RAG Gemini</a:t>
             </a:r>
           </a:p>
         </p:txBody>
@@ -13894,7 +13933,7 @@
                 </a:solidFill>
                 <a:latin typeface="Calibri"/>
               </a:rPr>
-              <a:t>Guardrail 0.40 F1=0.92</a:t>
+              <a:t>Guardrail 0.40 hit@5=91.3%</a:t>
             </a:r>
           </a:p>
         </p:txBody>
@@ -18965,7 +19004,7 @@
                 </a:solidFill>
                 <a:latin typeface="Calibri"/>
               </a:rPr>
-              <a:t>Recommandation de cocktails par IA semantique. 483 cocktails (4 sources Kaggle), SBERT all-MiniLM-L6-v2 384 dims, guardrail cosinus 0.40 (calibre 30 requetes), RAG + GPT-2 fine-tune, cache JSON MD5.</a:t>
+              <a:t>Recommandation de cocktails par IA semantique. 1280 cocktails (4 sources fusionnees), SBERT all-MiniLM-L6-v2 384 dims, guardrail cosinus 0.40 (calibre 30 requetes), RAG + GPT-2 fine-tune, cache JSON MD5.</a:t>
             </a:r>
           </a:p>
         </p:txBody>

--- a/Soutenance_Bloc1-2_Adam_Emilien.pptx
+++ b/Soutenance_Bloc1-2_Adam_Emilien.pptx
@@ -3484,6 +3484,45 @@
           </a:p>
         </p:txBody>
       </p:sp>
+      <p:sp>
+        <p:nvSpPr>
+          <p:cNvPr id="11" name="TextBox 10"/>
+          <p:cNvSpPr txBox="1"/>
+          <p:nvPr/>
+        </p:nvSpPr>
+        <p:spPr>
+          <a:xfrm>
+            <a:off x="502920" y="4828032"/>
+            <a:ext cx="10972800" cy="347472"/>
+          </a:xfrm>
+          <a:prstGeom prst="rect">
+            <a:avLst/>
+          </a:prstGeom>
+          <a:noFill/>
+        </p:spPr>
+        <p:txBody>
+          <a:bodyPr wrap="square" anchor="t" lIns="0" rIns="0" tIns="0" bIns="0">
+            <a:spAutoFit/>
+          </a:bodyPr>
+          <a:lstStyle/>
+          <a:p>
+            <a:pPr algn="l">
+              <a:lnSpc>
+                <a:spcPct val="100000"/>
+              </a:lnSpc>
+            </a:pPr>
+            <a:r>
+              <a:rPr sz="1350" b="1" i="0">
+                <a:solidFill>
+                  <a:srgbClr val="FF43B8"/>
+                </a:solidFill>
+                <a:latin typeface="Gilroy"/>
+              </a:rPr>
+              <a:t>Jury 5  |  Salle K006  |  2 juillet 2026  |  9h - 10h</a:t>
+            </a:r>
+          </a:p>
+        </p:txBody>
+      </p:sp>
     </p:spTree>
   </p:cSld>
   <p:clrMapOvr>
@@ -4852,7 +4891,7 @@
                 </a:solidFill>
                 <a:latin typeface="Calibri"/>
               </a:rPr>
-              <a:t>6 etapes : distributions, boxplots outliers, heatmap correlations, desequilibre 88/12 %, scatter vibration x temperature, tendances temporelles.</a:t>
+              <a:t>6 etapes : distributions, boxplots outliers, heatmap correlations, desequilibre 85.2/14.8 % (20 484 normales / 3 558 pannes), scatter vibration x temperature, tendances temporelles.</a:t>
             </a:r>
           </a:p>
         </p:txBody>
@@ -9063,7 +9102,7 @@
                 </a:solidFill>
                 <a:latin typeface="Calibri"/>
               </a:rPr>
-              <a:t>Requete -&gt; SBERT all-MiniLM-L6-v2 -&gt; cosinus -&gt; guardrail 0.40 -&gt; cache JSON MD5 -&gt; GPT-2 fine-tune (RAG)</a:t>
+              <a:t>Requete -&gt; guardrail SBERT cosinus 0.40 (calibre 30 requetes) -&gt; cache JSON MD5 -&gt; retrieval SBERT + generation GPT-2</a:t>
             </a:r>
           </a:p>
         </p:txBody>
@@ -9665,7 +9704,7 @@
                 </a:solidFill>
                 <a:latin typeface="Calibri"/>
               </a:rPr>
-              <a:t>local, 80 MB, 384 dims, L2-normalise. P@5=0.79 vs TF-IDF 0.41 (+93%). CPU-only, adapte au domaine clos.</a:t>
+              <a:t>local, 80 MB, 384 dims. Choix vs TF-IDF : capture la semantique (« frais et fruite » trouve rhum-agrumes, TF-IDF echoue). CPU-only, adapte au domaine clos 600 cocktails.</a:t>
             </a:r>
           </a:p>
           <a:p>
@@ -9702,7 +9741,7 @@
                 </a:solidFill>
                 <a:latin typeface="Calibri"/>
               </a:rPr>
-              <a:t>117M params, 3 epochs, LR=5e-5 sur 447 recettes. BLEU-4=0.42, ROUGE-L=0.58. Generation bornee par le contexte RAG.</a:t>
+              <a:t>generation locale, 117M params, 3 epochs sur corpus cocktails. Fallback template si modele absent. Bornee par contexte RAG retrieved.</a:t>
             </a:r>
           </a:p>
           <a:p>
@@ -9739,7 +9778,7 @@
                 </a:solidFill>
                 <a:latin typeface="Calibri"/>
               </a:rPr>
-              <a:t>1 calcul par requete unique. Latence cache hit &lt; 10 ms vs 2.1 s premier appel.</a:t>
+              <a:t>1 generation par requete unique. Latence cache hit &lt; 100 ms vs ~3 s premiere generation GPT-2.</a:t>
             </a:r>
           </a:p>
           <a:p>
@@ -9767,7 +9806,7 @@
                 </a:solidFill>
                 <a:latin typeface="Gilroy"/>
               </a:rPr>
-              <a:t>Guardrail  </a:t>
+              <a:t>Guardrail SBERT cosinus  </a:t>
             </a:r>
             <a:r>
               <a:rPr sz="1350" b="0" i="0">
@@ -9776,7 +9815,7 @@
                 </a:solidFill>
                 <a:latin typeface="Calibri"/>
               </a:rPr>
-              <a:t>seuil 0.40 (calibre sur 30 requetes labelisees). F1=0.92, Precision=0.95, Recall=0.90.</a:t>
+              <a:t>Seuil 0.40 calibre sur 30 requetes labelisees. Refusal rate 100 % apres calibration (vs 86.7 % avant).</a:t>
             </a:r>
           </a:p>
         </p:txBody>
@@ -9815,7 +9854,7 @@
                 </a:solidFill>
                 <a:latin typeface="Calibri"/>
               </a:rPr>
-              <a:t>Scenario : « quelque chose de frais et fruite » -&gt; Top-5 + radar ; « repare mon velo » -&gt; refus (score 0.23 &lt; 0.40).</a:t>
+              <a:t>Scenario : « quelque chose de frais et fruite » -&gt; Top-5 SBERT + radar ; « repare mon velo » -&gt; refus (score &lt; 0.40, out_of_domain_filtered).</a:t>
             </a:r>
           </a:p>
         </p:txBody>
@@ -10371,7 +10410,7 @@
                 </a:solidFill>
                 <a:latin typeface="Gilroy"/>
               </a:rPr>
-              <a:t>Guardrail F1=0.92  </a:t>
+              <a:t>Refusal rate 100 %  </a:t>
             </a:r>
             <a:r>
               <a:rPr sz="1400" b="0" i="0">
@@ -10380,7 +10419,7 @@
                 </a:solidFill>
                 <a:latin typeface="Calibri"/>
               </a:rPr>
-              <a:t>seuil 0.40, Precision=0.95, Recall=0.90. 94% des requetes hors-domaine rejetees (30 cas testes).</a:t>
+              <a:t>15/15 requetes hors-domaine rejetees apres calibration du guardrail. Avant : 86.7% (13/15). Delta +13.3%.</a:t>
             </a:r>
           </a:p>
           <a:p>
@@ -10408,7 +10447,7 @@
                 </a:solidFill>
                 <a:latin typeface="Gilroy"/>
               </a:rPr>
-              <a:t>Retrieval P@5=0.79  </a:t>
+              <a:t>hit@5 = 91.3 %  </a:t>
             </a:r>
             <a:r>
               <a:rPr sz="1400" b="0" i="0">
@@ -10417,7 +10456,7 @@
                 </a:solidFill>
                 <a:latin typeface="Calibri"/>
               </a:rPr>
-              <a:t>NDCG@5=0.81. Gain +93% vs TF-IDF baseline (0.41). Latence : 45 ms retrieval, &lt; 10 ms cache hit.</a:t>
+              <a:t>21/23 requetes in-domain avec au moins 1 resultat pertinent dans le Top-5 (SBERT cosinus sur 1280 cocktails).</a:t>
             </a:r>
           </a:p>
           <a:p>
@@ -10445,7 +10484,7 @@
                 </a:solidFill>
                 <a:latin typeface="Gilroy"/>
               </a:rPr>
-              <a:t>Generation BLEU-4=0.42  </a:t>
+              <a:t>Retrieval P@1=90 %  </a:t>
             </a:r>
             <a:r>
               <a:rPr sz="1400" b="0" i="0">
@@ -10454,7 +10493,7 @@
                 </a:solidFill>
                 <a:latin typeface="Calibri"/>
               </a:rPr>
-              <a:t>ROUGE-L=0.58. Coherent avec la litterature recettes (0.35-0.55 typique). 62 tests pytest.</a:t>
+              <a:t>NDCG@3,5,10 = 0.963. Evalue sur 23 requetes in-domain + 15 OOD = 38 requetes labelisees au total.</a:t>
             </a:r>
           </a:p>
           <a:p>
@@ -10491,7 +10530,7 @@
                 </a:solidFill>
                 <a:latin typeface="Calibri"/>
               </a:rPr>
-              <a:t>FAISS persistant pour scale 100k+, fine-tuning SBERT domaine, LaBSE/XLM-R pour FR/EN/ES natif.</a:t>
+              <a:t>FAISS persistant pour scale 100k+, fine-tuning SBERT domaine cocktails, LaBSE pour queries FR/EN/ES.</a:t>
             </a:r>
           </a:p>
         </p:txBody>
@@ -13390,7 +13429,7 @@
                 </a:solidFill>
                 <a:latin typeface="Calibri"/>
               </a:rPr>
-              <a:t>Eval XGBoost F1=0.886</a:t>
+              <a:t>XGBoost F1=0.886 ROC=0.995</a:t>
             </a:r>
           </a:p>
         </p:txBody>
@@ -13726,7 +13765,7 @@
                 </a:solidFill>
                 <a:latin typeface="Calibri"/>
               </a:rPr>
-              <a:t>SBERT + RAG GPT-2</a:t>
+              <a:t>SBERT + RAG Gemini</a:t>
             </a:r>
           </a:p>
         </p:txBody>
@@ -13894,7 +13933,7 @@
                 </a:solidFill>
                 <a:latin typeface="Calibri"/>
               </a:rPr>
-              <a:t>Guardrail 0.40 F1=0.92</a:t>
+              <a:t>Guardrail 0.40 hit@5=91.3%</a:t>
             </a:r>
           </a:p>
         </p:txBody>
@@ -18965,7 +19004,7 @@
                 </a:solidFill>
                 <a:latin typeface="Calibri"/>
               </a:rPr>
-              <a:t>Recommandation de cocktails par IA semantique. 447 cocktails, SBERT all-MiniLM-L6-v2 384 dims, guardrail cosinus 0.40 (calibre 30 requetes), RAG + GPT-2 fine-tune, cache JSON MD5.</a:t>
+              <a:t>Recommandation de cocktails par IA semantique. 1280 cocktails (4 sources fusionnees), SBERT all-MiniLM-L6-v2 384 dims, guardrail cosinus 0.40 (calibre 30 requetes), RAG + GPT-2 fine-tune, cache JSON MD5.</a:t>
             </a:r>
           </a:p>
         </p:txBody>
@@ -19980,7 +20019,7 @@
                 </a:solidFill>
                 <a:latin typeface="Calibri"/>
               </a:rPr>
-              <a:t>Backend RAG/SBERT, guardrail semantique, cache JSON MD5, evaluation</a:t>
+              <a:t>Backend RAG/SBERT, guardrail semantique, cache SQLite MD5, evaluation</a:t>
             </a:r>
           </a:p>
         </p:txBody>

--- a/Soutenance_Bloc1-2_Adam_Emilien.pptx
+++ b/Soutenance_Bloc1-2_Adam_Emilien.pptx
@@ -4211,7 +4211,64 @@
       </p:sp>
       <p:sp>
         <p:nvSpPr>
-          <p:cNvPr id="12" name="Rectangle 11"/>
+          <p:cNvPr id="12" name="Rounded Rectangle 11">
+            <a:hlinkClick r:id="rId2"/>
+          </p:cNvPr>
+          <p:cNvSpPr/>
+          <p:nvPr/>
+        </p:nvSpPr>
+        <p:spPr>
+          <a:xfrm>
+            <a:off x="8705088" y="1152144"/>
+            <a:ext cx="2999232" cy="438912"/>
+          </a:xfrm>
+          <a:prstGeom prst="roundRect">
+            <a:avLst>
+              <a:gd name="adj" fmla="val 30000"/>
+            </a:avLst>
+          </a:prstGeom>
+          <a:solidFill>
+            <a:srgbClr val="FF43B8"/>
+          </a:solidFill>
+          <a:ln>
+            <a:noFill/>
+          </a:ln>
+          <a:effectLst/>
+        </p:spPr>
+        <p:style>
+          <a:lnRef idx="1">
+            <a:schemeClr val="accent1"/>
+          </a:lnRef>
+          <a:fillRef idx="3">
+            <a:schemeClr val="accent1"/>
+          </a:fillRef>
+          <a:effectRef idx="2">
+            <a:schemeClr val="accent1"/>
+          </a:effectRef>
+          <a:fontRef idx="minor">
+            <a:schemeClr val="lt1"/>
+          </a:fontRef>
+        </p:style>
+        <p:txBody>
+          <a:bodyPr rtlCol="0" anchor="ctr" wrap="square" lIns="76200" rIns="76200" tIns="25400" bIns="25400"/>
+          <a:lstStyle/>
+          <a:p>
+            <a:pPr algn="ctr"/>
+            <a:r>
+              <a:rPr sz="1200" b="1" i="0">
+                <a:solidFill>
+                  <a:srgbClr val="FFFFFF"/>
+                </a:solidFill>
+                <a:latin typeface="Gilroy"/>
+              </a:rPr>
+              <a:t>DEMO  -  TOUT LANCER</a:t>
+            </a:r>
+          </a:p>
+        </p:txBody>
+      </p:sp>
+      <p:sp>
+        <p:nvSpPr>
+          <p:cNvPr id="13" name="Rectangle 12"/>
           <p:cNvSpPr/>
           <p:nvPr/>
         </p:nvSpPr>
@@ -4255,7 +4312,7 @@
       </p:sp>
       <p:sp>
         <p:nvSpPr>
-          <p:cNvPr id="13" name="TextBox 12"/>
+          <p:cNvPr id="14" name="TextBox 13"/>
           <p:cNvSpPr txBox="1"/>
           <p:nvPr/>
         </p:nvSpPr>
@@ -4294,7 +4351,7 @@
       </p:sp>
       <p:sp>
         <p:nvSpPr>
-          <p:cNvPr id="14" name="TextBox 13"/>
+          <p:cNvPr id="15" name="TextBox 14"/>
           <p:cNvSpPr txBox="1"/>
           <p:nvPr/>
         </p:nvSpPr>
@@ -5007,7 +5064,64 @@
       </p:sp>
       <p:sp>
         <p:nvSpPr>
-          <p:cNvPr id="12" name="Rectangle 11"/>
+          <p:cNvPr id="12" name="Rounded Rectangle 11">
+            <a:hlinkClick r:id="rId3"/>
+          </p:cNvPr>
+          <p:cNvSpPr/>
+          <p:nvPr/>
+        </p:nvSpPr>
+        <p:spPr>
+          <a:xfrm>
+            <a:off x="8705088" y="1152144"/>
+            <a:ext cx="2999232" cy="438912"/>
+          </a:xfrm>
+          <a:prstGeom prst="roundRect">
+            <a:avLst>
+              <a:gd name="adj" fmla="val 30000"/>
+            </a:avLst>
+          </a:prstGeom>
+          <a:solidFill>
+            <a:srgbClr val="FF43B8"/>
+          </a:solidFill>
+          <a:ln>
+            <a:noFill/>
+          </a:ln>
+          <a:effectLst/>
+        </p:spPr>
+        <p:style>
+          <a:lnRef idx="1">
+            <a:schemeClr val="accent1"/>
+          </a:lnRef>
+          <a:fillRef idx="3">
+            <a:schemeClr val="accent1"/>
+          </a:fillRef>
+          <a:effectRef idx="2">
+            <a:schemeClr val="accent1"/>
+          </a:effectRef>
+          <a:fontRef idx="minor">
+            <a:schemeClr val="lt1"/>
+          </a:fontRef>
+        </p:style>
+        <p:txBody>
+          <a:bodyPr rtlCol="0" anchor="ctr" wrap="square" lIns="76200" rIns="76200" tIns="25400" bIns="25400"/>
+          <a:lstStyle/>
+          <a:p>
+            <a:pPr algn="ctr"/>
+            <a:r>
+              <a:rPr sz="1200" b="1" i="0">
+                <a:solidFill>
+                  <a:srgbClr val="FFFFFF"/>
+                </a:solidFill>
+                <a:latin typeface="Gilroy"/>
+              </a:rPr>
+              <a:t>DEMO  -  TOUT LANCER</a:t>
+            </a:r>
+          </a:p>
+        </p:txBody>
+      </p:sp>
+      <p:sp>
+        <p:nvSpPr>
+          <p:cNvPr id="13" name="Rectangle 12"/>
           <p:cNvSpPr/>
           <p:nvPr/>
         </p:nvSpPr>
@@ -5051,7 +5165,7 @@
       </p:sp>
       <p:sp>
         <p:nvSpPr>
-          <p:cNvPr id="13" name="TextBox 12"/>
+          <p:cNvPr id="14" name="TextBox 13"/>
           <p:cNvSpPr txBox="1"/>
           <p:nvPr/>
         </p:nvSpPr>
@@ -5090,7 +5204,7 @@
       </p:sp>
       <p:sp>
         <p:nvSpPr>
-          <p:cNvPr id="14" name="TextBox 13"/>
+          <p:cNvPr id="15" name="TextBox 14"/>
           <p:cNvSpPr txBox="1"/>
           <p:nvPr/>
         </p:nvSpPr>
@@ -6958,7 +7072,64 @@
       </p:sp>
       <p:sp>
         <p:nvSpPr>
-          <p:cNvPr id="34" name="Rectangle 33"/>
+          <p:cNvPr id="34" name="Rounded Rectangle 33">
+            <a:hlinkClick r:id="rId2"/>
+          </p:cNvPr>
+          <p:cNvSpPr/>
+          <p:nvPr/>
+        </p:nvSpPr>
+        <p:spPr>
+          <a:xfrm>
+            <a:off x="8705088" y="1152144"/>
+            <a:ext cx="2999232" cy="438912"/>
+          </a:xfrm>
+          <a:prstGeom prst="roundRect">
+            <a:avLst>
+              <a:gd name="adj" fmla="val 30000"/>
+            </a:avLst>
+          </a:prstGeom>
+          <a:solidFill>
+            <a:srgbClr val="FF43B8"/>
+          </a:solidFill>
+          <a:ln>
+            <a:noFill/>
+          </a:ln>
+          <a:effectLst/>
+        </p:spPr>
+        <p:style>
+          <a:lnRef idx="1">
+            <a:schemeClr val="accent1"/>
+          </a:lnRef>
+          <a:fillRef idx="3">
+            <a:schemeClr val="accent1"/>
+          </a:fillRef>
+          <a:effectRef idx="2">
+            <a:schemeClr val="accent1"/>
+          </a:effectRef>
+          <a:fontRef idx="minor">
+            <a:schemeClr val="lt1"/>
+          </a:fontRef>
+        </p:style>
+        <p:txBody>
+          <a:bodyPr rtlCol="0" anchor="ctr" wrap="square" lIns="76200" rIns="76200" tIns="25400" bIns="25400"/>
+          <a:lstStyle/>
+          <a:p>
+            <a:pPr algn="ctr"/>
+            <a:r>
+              <a:rPr sz="1200" b="1" i="0">
+                <a:solidFill>
+                  <a:srgbClr val="FFFFFF"/>
+                </a:solidFill>
+                <a:latin typeface="Gilroy"/>
+              </a:rPr>
+              <a:t>DEMO  -  TOUT LANCER</a:t>
+            </a:r>
+          </a:p>
+        </p:txBody>
+      </p:sp>
+      <p:sp>
+        <p:nvSpPr>
+          <p:cNvPr id="35" name="Rectangle 34"/>
           <p:cNvSpPr/>
           <p:nvPr/>
         </p:nvSpPr>
@@ -7002,7 +7173,7 @@
       </p:sp>
       <p:sp>
         <p:nvSpPr>
-          <p:cNvPr id="35" name="TextBox 34"/>
+          <p:cNvPr id="36" name="TextBox 35"/>
           <p:cNvSpPr txBox="1"/>
           <p:nvPr/>
         </p:nvSpPr>
@@ -7041,7 +7212,7 @@
       </p:sp>
       <p:sp>
         <p:nvSpPr>
-          <p:cNvPr id="36" name="TextBox 35"/>
+          <p:cNvPr id="37" name="TextBox 36"/>
           <p:cNvSpPr txBox="1"/>
           <p:nvPr/>
         </p:nvSpPr>
@@ -7336,7 +7507,9 @@
       </p:sp>
       <p:sp>
         <p:nvSpPr>
-          <p:cNvPr id="7" name="Rounded Rectangle 6"/>
+          <p:cNvPr id="7" name="Rounded Rectangle 6">
+            <a:hlinkClick r:id="rId2"/>
+          </p:cNvPr>
           <p:cNvSpPr/>
           <p:nvPr/>
         </p:nvSpPr>
@@ -7378,13 +7551,13 @@
           <a:p>
             <a:pPr algn="ctr"/>
             <a:r>
-              <a:rPr sz="1250" b="1" i="0">
+              <a:rPr sz="1200" b="1" i="0">
                 <a:solidFill>
                   <a:srgbClr val="FFFFFF"/>
                 </a:solidFill>
                 <a:latin typeface="Gilroy"/>
               </a:rPr>
-              <a:t>DEMO LIVE  -  90 s</a:t>
+              <a:t>DEMO  -  TOUT LANCER</a:t>
             </a:r>
           </a:p>
         </p:txBody>
@@ -7654,7 +7827,7 @@
           <p:nvPr/>
         </p:nvPicPr>
         <p:blipFill>
-          <a:blip r:embed="rId2"/>
+          <a:blip r:embed="rId3"/>
           <a:stretch>
             <a:fillRect/>
           </a:stretch>
@@ -7672,7 +7845,7 @@
       <p:sp>
         <p:nvSpPr>
           <p:cNvPr id="12" name="Rounded Rectangle 11">
-            <a:hlinkClick r:id="rId3"/>
+            <a:hlinkClick r:id="rId4"/>
           </p:cNvPr>
           <p:cNvSpPr/>
           <p:nvPr/>
@@ -8482,7 +8655,64 @@
       </p:sp>
       <p:sp>
         <p:nvSpPr>
-          <p:cNvPr id="12" name="Rectangle 11"/>
+          <p:cNvPr id="12" name="Rounded Rectangle 11">
+            <a:hlinkClick r:id="rId2"/>
+          </p:cNvPr>
+          <p:cNvSpPr/>
+          <p:nvPr/>
+        </p:nvSpPr>
+        <p:spPr>
+          <a:xfrm>
+            <a:off x="8705088" y="1152144"/>
+            <a:ext cx="2999232" cy="438912"/>
+          </a:xfrm>
+          <a:prstGeom prst="roundRect">
+            <a:avLst>
+              <a:gd name="adj" fmla="val 30000"/>
+            </a:avLst>
+          </a:prstGeom>
+          <a:solidFill>
+            <a:srgbClr val="FF43B8"/>
+          </a:solidFill>
+          <a:ln>
+            <a:noFill/>
+          </a:ln>
+          <a:effectLst/>
+        </p:spPr>
+        <p:style>
+          <a:lnRef idx="1">
+            <a:schemeClr val="accent1"/>
+          </a:lnRef>
+          <a:fillRef idx="3">
+            <a:schemeClr val="accent1"/>
+          </a:fillRef>
+          <a:effectRef idx="2">
+            <a:schemeClr val="accent1"/>
+          </a:effectRef>
+          <a:fontRef idx="minor">
+            <a:schemeClr val="lt1"/>
+          </a:fontRef>
+        </p:style>
+        <p:txBody>
+          <a:bodyPr rtlCol="0" anchor="ctr" wrap="square" lIns="76200" rIns="76200" tIns="25400" bIns="25400"/>
+          <a:lstStyle/>
+          <a:p>
+            <a:pPr algn="ctr"/>
+            <a:r>
+              <a:rPr sz="1200" b="1" i="0">
+                <a:solidFill>
+                  <a:srgbClr val="FFFFFF"/>
+                </a:solidFill>
+                <a:latin typeface="Gilroy"/>
+              </a:rPr>
+              <a:t>DEMO  -  TOUT LANCER</a:t>
+            </a:r>
+          </a:p>
+        </p:txBody>
+      </p:sp>
+      <p:sp>
+        <p:nvSpPr>
+          <p:cNvPr id="13" name="Rectangle 12"/>
           <p:cNvSpPr/>
           <p:nvPr/>
         </p:nvSpPr>
@@ -8526,7 +8756,7 @@
       </p:sp>
       <p:sp>
         <p:nvSpPr>
-          <p:cNvPr id="13" name="TextBox 12"/>
+          <p:cNvPr id="14" name="TextBox 13"/>
           <p:cNvSpPr txBox="1"/>
           <p:nvPr/>
         </p:nvSpPr>
@@ -8565,7 +8795,7 @@
       </p:sp>
       <p:sp>
         <p:nvSpPr>
-          <p:cNvPr id="14" name="TextBox 13"/>
+          <p:cNvPr id="15" name="TextBox 14"/>
           <p:cNvSpPr txBox="1"/>
           <p:nvPr/>
         </p:nvSpPr>
@@ -9218,7 +9448,64 @@
       </p:sp>
       <p:sp>
         <p:nvSpPr>
-          <p:cNvPr id="13" name="Rectangle 12"/>
+          <p:cNvPr id="13" name="Rounded Rectangle 12">
+            <a:hlinkClick r:id="rId3"/>
+          </p:cNvPr>
+          <p:cNvSpPr/>
+          <p:nvPr/>
+        </p:nvSpPr>
+        <p:spPr>
+          <a:xfrm>
+            <a:off x="8705088" y="1152144"/>
+            <a:ext cx="2999232" cy="438912"/>
+          </a:xfrm>
+          <a:prstGeom prst="roundRect">
+            <a:avLst>
+              <a:gd name="adj" fmla="val 30000"/>
+            </a:avLst>
+          </a:prstGeom>
+          <a:solidFill>
+            <a:srgbClr val="FF43B8"/>
+          </a:solidFill>
+          <a:ln>
+            <a:noFill/>
+          </a:ln>
+          <a:effectLst/>
+        </p:spPr>
+        <p:style>
+          <a:lnRef idx="1">
+            <a:schemeClr val="accent1"/>
+          </a:lnRef>
+          <a:fillRef idx="3">
+            <a:schemeClr val="accent1"/>
+          </a:fillRef>
+          <a:effectRef idx="2">
+            <a:schemeClr val="accent1"/>
+          </a:effectRef>
+          <a:fontRef idx="minor">
+            <a:schemeClr val="lt1"/>
+          </a:fontRef>
+        </p:style>
+        <p:txBody>
+          <a:bodyPr rtlCol="0" anchor="ctr" wrap="square" lIns="76200" rIns="76200" tIns="25400" bIns="25400"/>
+          <a:lstStyle/>
+          <a:p>
+            <a:pPr algn="ctr"/>
+            <a:r>
+              <a:rPr sz="1200" b="1" i="0">
+                <a:solidFill>
+                  <a:srgbClr val="FFFFFF"/>
+                </a:solidFill>
+                <a:latin typeface="Gilroy"/>
+              </a:rPr>
+              <a:t>DEMO  -  TOUT LANCER</a:t>
+            </a:r>
+          </a:p>
+        </p:txBody>
+      </p:sp>
+      <p:sp>
+        <p:nvSpPr>
+          <p:cNvPr id="14" name="Rectangle 13"/>
           <p:cNvSpPr/>
           <p:nvPr/>
         </p:nvSpPr>
@@ -9262,7 +9549,7 @@
       </p:sp>
       <p:sp>
         <p:nvSpPr>
-          <p:cNvPr id="14" name="TextBox 13"/>
+          <p:cNvPr id="15" name="TextBox 14"/>
           <p:cNvSpPr txBox="1"/>
           <p:nvPr/>
         </p:nvSpPr>
@@ -9301,7 +9588,7 @@
       </p:sp>
       <p:sp>
         <p:nvSpPr>
-          <p:cNvPr id="15" name="TextBox 14"/>
+          <p:cNvPr id="16" name="TextBox 15"/>
           <p:cNvSpPr txBox="1"/>
           <p:nvPr/>
         </p:nvSpPr>
@@ -9596,7 +9883,9 @@
       </p:sp>
       <p:sp>
         <p:nvSpPr>
-          <p:cNvPr id="7" name="Rounded Rectangle 6"/>
+          <p:cNvPr id="7" name="Rounded Rectangle 6">
+            <a:hlinkClick r:id="rId2"/>
+          </p:cNvPr>
           <p:cNvSpPr/>
           <p:nvPr/>
         </p:nvSpPr>
@@ -9638,13 +9927,13 @@
           <a:p>
             <a:pPr algn="ctr"/>
             <a:r>
-              <a:rPr sz="1250" b="1" i="0">
+              <a:rPr sz="1200" b="1" i="0">
                 <a:solidFill>
                   <a:srgbClr val="FFFFFF"/>
                 </a:solidFill>
                 <a:latin typeface="Gilroy"/>
               </a:rPr>
-              <a:t>DEMO LIVE  -  90 s</a:t>
+              <a:t>DEMO  -  TOUT LANCER</a:t>
             </a:r>
           </a:p>
         </p:txBody>
@@ -9914,7 +10203,7 @@
           <p:nvPr/>
         </p:nvPicPr>
         <p:blipFill>
-          <a:blip r:embed="rId2"/>
+          <a:blip r:embed="rId3"/>
           <a:stretch>
             <a:fillRect/>
           </a:stretch>
@@ -9932,7 +10221,7 @@
       <p:sp>
         <p:nvSpPr>
           <p:cNvPr id="12" name="Rounded Rectangle 11">
-            <a:hlinkClick r:id="rId3"/>
+            <a:hlinkClick r:id="rId4"/>
           </p:cNvPr>
           <p:cNvSpPr/>
           <p:nvPr/>
@@ -10770,7 +11059,64 @@
       </p:sp>
       <p:sp>
         <p:nvSpPr>
-          <p:cNvPr id="14" name="Rectangle 13"/>
+          <p:cNvPr id="14" name="Rounded Rectangle 13">
+            <a:hlinkClick r:id="rId3"/>
+          </p:cNvPr>
+          <p:cNvSpPr/>
+          <p:nvPr/>
+        </p:nvSpPr>
+        <p:spPr>
+          <a:xfrm>
+            <a:off x="8705088" y="1152144"/>
+            <a:ext cx="2999232" cy="438912"/>
+          </a:xfrm>
+          <a:prstGeom prst="roundRect">
+            <a:avLst>
+              <a:gd name="adj" fmla="val 30000"/>
+            </a:avLst>
+          </a:prstGeom>
+          <a:solidFill>
+            <a:srgbClr val="FF43B8"/>
+          </a:solidFill>
+          <a:ln>
+            <a:noFill/>
+          </a:ln>
+          <a:effectLst/>
+        </p:spPr>
+        <p:style>
+          <a:lnRef idx="1">
+            <a:schemeClr val="accent1"/>
+          </a:lnRef>
+          <a:fillRef idx="3">
+            <a:schemeClr val="accent1"/>
+          </a:fillRef>
+          <a:effectRef idx="2">
+            <a:schemeClr val="accent1"/>
+          </a:effectRef>
+          <a:fontRef idx="minor">
+            <a:schemeClr val="lt1"/>
+          </a:fontRef>
+        </p:style>
+        <p:txBody>
+          <a:bodyPr rtlCol="0" anchor="ctr" wrap="square" lIns="76200" rIns="76200" tIns="25400" bIns="25400"/>
+          <a:lstStyle/>
+          <a:p>
+            <a:pPr algn="ctr"/>
+            <a:r>
+              <a:rPr sz="1200" b="1" i="0">
+                <a:solidFill>
+                  <a:srgbClr val="FFFFFF"/>
+                </a:solidFill>
+                <a:latin typeface="Gilroy"/>
+              </a:rPr>
+              <a:t>DEMO  -  TOUT LANCER</a:t>
+            </a:r>
+          </a:p>
+        </p:txBody>
+      </p:sp>
+      <p:sp>
+        <p:nvSpPr>
+          <p:cNvPr id="15" name="Rectangle 14"/>
           <p:cNvSpPr/>
           <p:nvPr/>
         </p:nvSpPr>
@@ -10814,7 +11160,7 @@
       </p:sp>
       <p:sp>
         <p:nvSpPr>
-          <p:cNvPr id="15" name="TextBox 14"/>
+          <p:cNvPr id="16" name="TextBox 15"/>
           <p:cNvSpPr txBox="1"/>
           <p:nvPr/>
         </p:nvSpPr>
@@ -10853,7 +11199,7 @@
       </p:sp>
       <p:sp>
         <p:nvSpPr>
-          <p:cNvPr id="16" name="TextBox 15"/>
+          <p:cNvPr id="17" name="TextBox 16"/>
           <p:cNvSpPr txBox="1"/>
           <p:nvPr/>
         </p:nvSpPr>
@@ -20828,7 +21174,64 @@
       </p:sp>
       <p:sp>
         <p:nvSpPr>
-          <p:cNvPr id="12" name="Rectangle 11"/>
+          <p:cNvPr id="12" name="Rounded Rectangle 11">
+            <a:hlinkClick r:id="rId5"/>
+          </p:cNvPr>
+          <p:cNvSpPr/>
+          <p:nvPr/>
+        </p:nvSpPr>
+        <p:spPr>
+          <a:xfrm>
+            <a:off x="8705088" y="1152144"/>
+            <a:ext cx="2999232" cy="438912"/>
+          </a:xfrm>
+          <a:prstGeom prst="roundRect">
+            <a:avLst>
+              <a:gd name="adj" fmla="val 30000"/>
+            </a:avLst>
+          </a:prstGeom>
+          <a:solidFill>
+            <a:srgbClr val="FF43B8"/>
+          </a:solidFill>
+          <a:ln>
+            <a:noFill/>
+          </a:ln>
+          <a:effectLst/>
+        </p:spPr>
+        <p:style>
+          <a:lnRef idx="1">
+            <a:schemeClr val="accent1"/>
+          </a:lnRef>
+          <a:fillRef idx="3">
+            <a:schemeClr val="accent1"/>
+          </a:fillRef>
+          <a:effectRef idx="2">
+            <a:schemeClr val="accent1"/>
+          </a:effectRef>
+          <a:fontRef idx="minor">
+            <a:schemeClr val="lt1"/>
+          </a:fontRef>
+        </p:style>
+        <p:txBody>
+          <a:bodyPr rtlCol="0" anchor="ctr" wrap="square" lIns="76200" rIns="76200" tIns="25400" bIns="25400"/>
+          <a:lstStyle/>
+          <a:p>
+            <a:pPr algn="ctr"/>
+            <a:r>
+              <a:rPr sz="1200" b="1" i="0">
+                <a:solidFill>
+                  <a:srgbClr val="FFFFFF"/>
+                </a:solidFill>
+                <a:latin typeface="Gilroy"/>
+              </a:rPr>
+              <a:t>DEMO  -  TOUT LANCER</a:t>
+            </a:r>
+          </a:p>
+        </p:txBody>
+      </p:sp>
+      <p:sp>
+        <p:nvSpPr>
+          <p:cNvPr id="13" name="Rectangle 12"/>
           <p:cNvSpPr/>
           <p:nvPr/>
         </p:nvSpPr>
@@ -20872,7 +21275,7 @@
       </p:sp>
       <p:sp>
         <p:nvSpPr>
-          <p:cNvPr id="13" name="TextBox 12"/>
+          <p:cNvPr id="14" name="TextBox 13"/>
           <p:cNvSpPr txBox="1"/>
           <p:nvPr/>
         </p:nvSpPr>
@@ -20911,7 +21314,7 @@
       </p:sp>
       <p:sp>
         <p:nvSpPr>
-          <p:cNvPr id="14" name="TextBox 13"/>
+          <p:cNvPr id="15" name="TextBox 14"/>
           <p:cNvSpPr txBox="1"/>
           <p:nvPr/>
         </p:nvSpPr>
@@ -21854,7 +22257,64 @@
       </p:sp>
       <p:sp>
         <p:nvSpPr>
-          <p:cNvPr id="16" name="Rectangle 15"/>
+          <p:cNvPr id="16" name="Rounded Rectangle 15">
+            <a:hlinkClick r:id="rId2"/>
+          </p:cNvPr>
+          <p:cNvSpPr/>
+          <p:nvPr/>
+        </p:nvSpPr>
+        <p:spPr>
+          <a:xfrm>
+            <a:off x="8705088" y="1152144"/>
+            <a:ext cx="2999232" cy="438912"/>
+          </a:xfrm>
+          <a:prstGeom prst="roundRect">
+            <a:avLst>
+              <a:gd name="adj" fmla="val 30000"/>
+            </a:avLst>
+          </a:prstGeom>
+          <a:solidFill>
+            <a:srgbClr val="FF43B8"/>
+          </a:solidFill>
+          <a:ln>
+            <a:noFill/>
+          </a:ln>
+          <a:effectLst/>
+        </p:spPr>
+        <p:style>
+          <a:lnRef idx="1">
+            <a:schemeClr val="accent1"/>
+          </a:lnRef>
+          <a:fillRef idx="3">
+            <a:schemeClr val="accent1"/>
+          </a:fillRef>
+          <a:effectRef idx="2">
+            <a:schemeClr val="accent1"/>
+          </a:effectRef>
+          <a:fontRef idx="minor">
+            <a:schemeClr val="lt1"/>
+          </a:fontRef>
+        </p:style>
+        <p:txBody>
+          <a:bodyPr rtlCol="0" anchor="ctr" wrap="square" lIns="76200" rIns="76200" tIns="25400" bIns="25400"/>
+          <a:lstStyle/>
+          <a:p>
+            <a:pPr algn="ctr"/>
+            <a:r>
+              <a:rPr sz="1200" b="1" i="0">
+                <a:solidFill>
+                  <a:srgbClr val="FFFFFF"/>
+                </a:solidFill>
+                <a:latin typeface="Gilroy"/>
+              </a:rPr>
+              <a:t>DEMO  -  TOUT LANCER</a:t>
+            </a:r>
+          </a:p>
+        </p:txBody>
+      </p:sp>
+      <p:sp>
+        <p:nvSpPr>
+          <p:cNvPr id="17" name="Rectangle 16"/>
           <p:cNvSpPr/>
           <p:nvPr/>
         </p:nvSpPr>
@@ -21898,7 +22358,7 @@
       </p:sp>
       <p:sp>
         <p:nvSpPr>
-          <p:cNvPr id="17" name="TextBox 16"/>
+          <p:cNvPr id="18" name="TextBox 17"/>
           <p:cNvSpPr txBox="1"/>
           <p:nvPr/>
         </p:nvSpPr>
@@ -21937,7 +22397,7 @@
       </p:sp>
       <p:sp>
         <p:nvSpPr>
-          <p:cNvPr id="18" name="TextBox 17"/>
+          <p:cNvPr id="19" name="TextBox 18"/>
           <p:cNvSpPr txBox="1"/>
           <p:nvPr/>
         </p:nvSpPr>
@@ -22683,7 +23143,64 @@
       </p:sp>
       <p:sp>
         <p:nvSpPr>
-          <p:cNvPr id="14" name="Rectangle 13"/>
+          <p:cNvPr id="14" name="Rounded Rectangle 13">
+            <a:hlinkClick r:id="rId4"/>
+          </p:cNvPr>
+          <p:cNvSpPr/>
+          <p:nvPr/>
+        </p:nvSpPr>
+        <p:spPr>
+          <a:xfrm>
+            <a:off x="8705088" y="1152144"/>
+            <a:ext cx="2999232" cy="438912"/>
+          </a:xfrm>
+          <a:prstGeom prst="roundRect">
+            <a:avLst>
+              <a:gd name="adj" fmla="val 30000"/>
+            </a:avLst>
+          </a:prstGeom>
+          <a:solidFill>
+            <a:srgbClr val="FF43B8"/>
+          </a:solidFill>
+          <a:ln>
+            <a:noFill/>
+          </a:ln>
+          <a:effectLst/>
+        </p:spPr>
+        <p:style>
+          <a:lnRef idx="1">
+            <a:schemeClr val="accent1"/>
+          </a:lnRef>
+          <a:fillRef idx="3">
+            <a:schemeClr val="accent1"/>
+          </a:fillRef>
+          <a:effectRef idx="2">
+            <a:schemeClr val="accent1"/>
+          </a:effectRef>
+          <a:fontRef idx="minor">
+            <a:schemeClr val="lt1"/>
+          </a:fontRef>
+        </p:style>
+        <p:txBody>
+          <a:bodyPr rtlCol="0" anchor="ctr" wrap="square" lIns="76200" rIns="76200" tIns="25400" bIns="25400"/>
+          <a:lstStyle/>
+          <a:p>
+            <a:pPr algn="ctr"/>
+            <a:r>
+              <a:rPr sz="1200" b="1" i="0">
+                <a:solidFill>
+                  <a:srgbClr val="FFFFFF"/>
+                </a:solidFill>
+                <a:latin typeface="Gilroy"/>
+              </a:rPr>
+              <a:t>DEMO  -  TOUT LANCER</a:t>
+            </a:r>
+          </a:p>
+        </p:txBody>
+      </p:sp>
+      <p:sp>
+        <p:nvSpPr>
+          <p:cNvPr id="15" name="Rectangle 14"/>
           <p:cNvSpPr/>
           <p:nvPr/>
         </p:nvSpPr>
@@ -22727,7 +23244,7 @@
       </p:sp>
       <p:sp>
         <p:nvSpPr>
-          <p:cNvPr id="15" name="TextBox 14"/>
+          <p:cNvPr id="16" name="TextBox 15"/>
           <p:cNvSpPr txBox="1"/>
           <p:nvPr/>
         </p:nvSpPr>
@@ -22766,7 +23283,7 @@
       </p:sp>
       <p:sp>
         <p:nvSpPr>
-          <p:cNvPr id="16" name="TextBox 15"/>
+          <p:cNvPr id="17" name="TextBox 16"/>
           <p:cNvSpPr txBox="1"/>
           <p:nvPr/>
         </p:nvSpPr>
@@ -23061,7 +23578,9 @@
       </p:sp>
       <p:sp>
         <p:nvSpPr>
-          <p:cNvPr id="7" name="Rounded Rectangle 6"/>
+          <p:cNvPr id="7" name="Rounded Rectangle 6">
+            <a:hlinkClick r:id="rId2"/>
+          </p:cNvPr>
           <p:cNvSpPr/>
           <p:nvPr/>
         </p:nvSpPr>
@@ -23103,13 +23622,13 @@
           <a:p>
             <a:pPr algn="ctr"/>
             <a:r>
-              <a:rPr sz="1250" b="1" i="0">
+              <a:rPr sz="1200" b="1" i="0">
                 <a:solidFill>
                   <a:srgbClr val="FFFFFF"/>
                 </a:solidFill>
                 <a:latin typeface="Gilroy"/>
               </a:rPr>
-              <a:t>DEMO LIVE  -  90 s</a:t>
+              <a:t>DEMO  -  TOUT LANCER</a:t>
             </a:r>
           </a:p>
         </p:txBody>
@@ -23455,7 +23974,7 @@
           <p:nvPr/>
         </p:nvPicPr>
         <p:blipFill>
-          <a:blip r:embed="rId2"/>
+          <a:blip r:embed="rId3"/>
           <a:stretch>
             <a:fillRect/>
           </a:stretch>
@@ -23473,7 +23992,7 @@
       <p:sp>
         <p:nvSpPr>
           <p:cNvPr id="13" name="Rounded Rectangle 12">
-            <a:hlinkClick r:id="rId3"/>
+            <a:hlinkClick r:id="rId4"/>
           </p:cNvPr>
           <p:cNvSpPr/>
           <p:nvPr/>
@@ -23530,7 +24049,7 @@
       <p:sp>
         <p:nvSpPr>
           <p:cNvPr id="14" name="Rounded Rectangle 13">
-            <a:hlinkClick r:id="rId4"/>
+            <a:hlinkClick r:id="rId5"/>
           </p:cNvPr>
           <p:cNvSpPr/>
           <p:nvPr/>
@@ -24323,7 +24842,64 @@
       </p:sp>
       <p:sp>
         <p:nvSpPr>
-          <p:cNvPr id="12" name="Rectangle 11"/>
+          <p:cNvPr id="12" name="Rounded Rectangle 11">
+            <a:hlinkClick r:id="rId2"/>
+          </p:cNvPr>
+          <p:cNvSpPr/>
+          <p:nvPr/>
+        </p:nvSpPr>
+        <p:spPr>
+          <a:xfrm>
+            <a:off x="8705088" y="1152144"/>
+            <a:ext cx="2999232" cy="438912"/>
+          </a:xfrm>
+          <a:prstGeom prst="roundRect">
+            <a:avLst>
+              <a:gd name="adj" fmla="val 30000"/>
+            </a:avLst>
+          </a:prstGeom>
+          <a:solidFill>
+            <a:srgbClr val="FF43B8"/>
+          </a:solidFill>
+          <a:ln>
+            <a:noFill/>
+          </a:ln>
+          <a:effectLst/>
+        </p:spPr>
+        <p:style>
+          <a:lnRef idx="1">
+            <a:schemeClr val="accent1"/>
+          </a:lnRef>
+          <a:fillRef idx="3">
+            <a:schemeClr val="accent1"/>
+          </a:fillRef>
+          <a:effectRef idx="2">
+            <a:schemeClr val="accent1"/>
+          </a:effectRef>
+          <a:fontRef idx="minor">
+            <a:schemeClr val="lt1"/>
+          </a:fontRef>
+        </p:style>
+        <p:txBody>
+          <a:bodyPr rtlCol="0" anchor="ctr" wrap="square" lIns="76200" rIns="76200" tIns="25400" bIns="25400"/>
+          <a:lstStyle/>
+          <a:p>
+            <a:pPr algn="ctr"/>
+            <a:r>
+              <a:rPr sz="1200" b="1" i="0">
+                <a:solidFill>
+                  <a:srgbClr val="FFFFFF"/>
+                </a:solidFill>
+                <a:latin typeface="Gilroy"/>
+              </a:rPr>
+              <a:t>DEMO  -  TOUT LANCER</a:t>
+            </a:r>
+          </a:p>
+        </p:txBody>
+      </p:sp>
+      <p:sp>
+        <p:nvSpPr>
+          <p:cNvPr id="13" name="Rectangle 12"/>
           <p:cNvSpPr/>
           <p:nvPr/>
         </p:nvSpPr>
@@ -24367,7 +24943,7 @@
       </p:sp>
       <p:sp>
         <p:nvSpPr>
-          <p:cNvPr id="13" name="TextBox 12"/>
+          <p:cNvPr id="14" name="TextBox 13"/>
           <p:cNvSpPr txBox="1"/>
           <p:nvPr/>
         </p:nvSpPr>
@@ -24406,7 +24982,7 @@
       </p:sp>
       <p:sp>
         <p:nvSpPr>
-          <p:cNvPr id="14" name="TextBox 13"/>
+          <p:cNvPr id="15" name="TextBox 14"/>
           <p:cNvSpPr txBox="1"/>
           <p:nvPr/>
         </p:nvSpPr>

--- a/Soutenance_Bloc1-2_Adam_Emilien.pptx
+++ b/Soutenance_Bloc1-2_Adam_Emilien.pptx
@@ -21069,63 +21069,6 @@
         <p:spPr>
           <a:xfrm>
             <a:off x="475488" y="5852160"/>
-            <a:ext cx="2194560" cy="457200"/>
-          </a:xfrm>
-          <a:prstGeom prst="roundRect">
-            <a:avLst>
-              <a:gd name="adj" fmla="val 30000"/>
-            </a:avLst>
-          </a:prstGeom>
-          <a:solidFill>
-            <a:srgbClr val="163767"/>
-          </a:solidFill>
-          <a:ln>
-            <a:noFill/>
-          </a:ln>
-          <a:effectLst/>
-        </p:spPr>
-        <p:style>
-          <a:lnRef idx="1">
-            <a:schemeClr val="accent1"/>
-          </a:lnRef>
-          <a:fillRef idx="3">
-            <a:schemeClr val="accent1"/>
-          </a:fillRef>
-          <a:effectRef idx="2">
-            <a:schemeClr val="accent1"/>
-          </a:effectRef>
-          <a:fontRef idx="minor">
-            <a:schemeClr val="lt1"/>
-          </a:fontRef>
-        </p:style>
-        <p:txBody>
-          <a:bodyPr rtlCol="0" anchor="ctr" wrap="square" lIns="76200" rIns="76200" tIns="25400" bIns="25400"/>
-          <a:lstStyle/>
-          <a:p>
-            <a:pPr algn="ctr"/>
-            <a:r>
-              <a:rPr sz="1150" b="1" i="0">
-                <a:solidFill>
-                  <a:srgbClr val="FFFFFF"/>
-                </a:solidFill>
-                <a:latin typeface="Gilroy"/>
-              </a:rPr>
-              <a:t>Demo live -&gt;</a:t>
-            </a:r>
-          </a:p>
-        </p:txBody>
-      </p:sp>
-      <p:sp>
-        <p:nvSpPr>
-          <p:cNvPr id="11" name="Rounded Rectangle 10">
-            <a:hlinkClick r:id="rId4"/>
-          </p:cNvPr>
-          <p:cNvSpPr/>
-          <p:nvPr/>
-        </p:nvSpPr>
-        <p:spPr>
-          <a:xfrm>
-            <a:off x="2834640" y="5852160"/>
             <a:ext cx="1828800" cy="457200"/>
           </a:xfrm>
           <a:prstGeom prst="roundRect">
@@ -21174,8 +21117,8 @@
       </p:sp>
       <p:sp>
         <p:nvSpPr>
-          <p:cNvPr id="12" name="Rounded Rectangle 11">
-            <a:hlinkClick r:id="rId5"/>
+          <p:cNvPr id="11" name="Rounded Rectangle 10">
+            <a:hlinkClick r:id="rId4"/>
           </p:cNvPr>
           <p:cNvSpPr/>
           <p:nvPr/>
@@ -21231,7 +21174,7 @@
       </p:sp>
       <p:sp>
         <p:nvSpPr>
-          <p:cNvPr id="13" name="Rectangle 12"/>
+          <p:cNvPr id="12" name="Rectangle 11"/>
           <p:cNvSpPr/>
           <p:nvPr/>
         </p:nvSpPr>
@@ -21275,7 +21218,7 @@
       </p:sp>
       <p:sp>
         <p:nvSpPr>
-          <p:cNvPr id="14" name="TextBox 13"/>
+          <p:cNvPr id="13" name="TextBox 12"/>
           <p:cNvSpPr txBox="1"/>
           <p:nvPr/>
         </p:nvSpPr>
@@ -21314,7 +21257,7 @@
       </p:sp>
       <p:sp>
         <p:nvSpPr>
-          <p:cNvPr id="15" name="TextBox 14"/>
+          <p:cNvPr id="14" name="TextBox 13"/>
           <p:cNvSpPr txBox="1"/>
           <p:nvPr/>
         </p:nvSpPr>
@@ -24048,64 +23991,7 @@
       </p:sp>
       <p:sp>
         <p:nvSpPr>
-          <p:cNvPr id="14" name="Rounded Rectangle 13">
-            <a:hlinkClick r:id="rId5"/>
-          </p:cNvPr>
-          <p:cNvSpPr/>
-          <p:nvPr/>
-        </p:nvSpPr>
-        <p:spPr>
-          <a:xfrm>
-            <a:off x="8796528" y="5650992"/>
-            <a:ext cx="2240280" cy="457200"/>
-          </a:xfrm>
-          <a:prstGeom prst="roundRect">
-            <a:avLst>
-              <a:gd name="adj" fmla="val 30000"/>
-            </a:avLst>
-          </a:prstGeom>
-          <a:solidFill>
-            <a:srgbClr val="051832"/>
-          </a:solidFill>
-          <a:ln>
-            <a:noFill/>
-          </a:ln>
-          <a:effectLst/>
-        </p:spPr>
-        <p:style>
-          <a:lnRef idx="1">
-            <a:schemeClr val="accent1"/>
-          </a:lnRef>
-          <a:fillRef idx="3">
-            <a:schemeClr val="accent1"/>
-          </a:fillRef>
-          <a:effectRef idx="2">
-            <a:schemeClr val="accent1"/>
-          </a:effectRef>
-          <a:fontRef idx="minor">
-            <a:schemeClr val="lt1"/>
-          </a:fontRef>
-        </p:style>
-        <p:txBody>
-          <a:bodyPr rtlCol="0" anchor="ctr" wrap="square" lIns="76200" rIns="76200" tIns="25400" bIns="25400"/>
-          <a:lstStyle/>
-          <a:p>
-            <a:pPr algn="ctr"/>
-            <a:r>
-              <a:rPr sz="1150" b="1" i="0">
-                <a:solidFill>
-                  <a:srgbClr val="FFFFFF"/>
-                </a:solidFill>
-                <a:latin typeface="Gilroy"/>
-              </a:rPr>
-              <a:t>Demo live -&gt;</a:t>
-            </a:r>
-          </a:p>
-        </p:txBody>
-      </p:sp>
-      <p:sp>
-        <p:nvSpPr>
-          <p:cNvPr id="15" name="Rectangle 14"/>
+          <p:cNvPr id="14" name="Rectangle 13"/>
           <p:cNvSpPr/>
           <p:nvPr/>
         </p:nvSpPr>
@@ -24149,7 +24035,7 @@
       </p:sp>
       <p:sp>
         <p:nvSpPr>
-          <p:cNvPr id="16" name="TextBox 15"/>
+          <p:cNvPr id="15" name="TextBox 14"/>
           <p:cNvSpPr txBox="1"/>
           <p:nvPr/>
         </p:nvSpPr>
@@ -24188,7 +24074,7 @@
       </p:sp>
       <p:sp>
         <p:nvSpPr>
-          <p:cNvPr id="17" name="TextBox 16"/>
+          <p:cNvPr id="16" name="TextBox 15"/>
           <p:cNvSpPr txBox="1"/>
           <p:nvPr/>
         </p:nvSpPr>

--- a/Soutenance_Bloc1-2_Adam_Emilien.pptx
+++ b/Soutenance_Bloc1-2_Adam_Emilien.pptx
@@ -4754,7 +4754,7 @@
                 </a:solidFill>
                 <a:latin typeface="Gilroy"/>
               </a:rPr>
-              <a:t>Dataset  </a:t>
+              <a:t>Donnees  </a:t>
             </a:r>
             <a:r>
               <a:rPr sz="1400" b="0" i="0">
@@ -4763,7 +4763,7 @@
                 </a:solidFill>
                 <a:latin typeface="Calibri"/>
               </a:rPr>
-              <a:t>Kaggle industrial_machine_maintenance  -  24 042 lignes x 15 variables.</a:t>
+              <a:t>24 042 mesures de capteurs industriels (vibrations, temperature, pression, courant) sur Kaggle.</a:t>
             </a:r>
           </a:p>
           <a:p>
@@ -4791,7 +4791,7 @@
                 </a:solidFill>
                 <a:latin typeface="Gilroy"/>
               </a:rPr>
-              <a:t>Cible  </a:t>
+              <a:t>Objectif  </a:t>
             </a:r>
             <a:r>
               <a:rPr sz="1400" b="0" i="0">
@@ -4800,7 +4800,7 @@
                 </a:solidFill>
                 <a:latin typeface="Calibri"/>
               </a:rPr>
-              <a:t>failure_within_24h (classe rare -&gt; desequilibre).</a:t>
+              <a:t>Predire si une panne surviendra dans les 24h - un evenement rare : 14.8 % des cas seulement.</a:t>
             </a:r>
           </a:p>
           <a:p>
@@ -4837,7 +4837,7 @@
                 </a:solidFill>
                 <a:latin typeface="Calibri"/>
               </a:rPr>
-              <a:t>imputation mediane (fit train), winsorisation outliers capteurs.</a:t>
+              <a:t>Valeurs aberrantes corrigees, valeurs manquantes remplies par la mediane (sans contaminer les donnees de test).</a:t>
             </a:r>
           </a:p>
           <a:p>
@@ -4865,7 +4865,7 @@
                 </a:solidFill>
                 <a:latin typeface="Gilroy"/>
               </a:rPr>
-              <a:t>Insight cle  </a:t>
+              <a:t>Decouverte cle  </a:t>
             </a:r>
             <a:r>
               <a:rPr sz="1400" b="0" i="0">
@@ -4874,7 +4874,7 @@
                 </a:solidFill>
                 <a:latin typeface="Calibri"/>
               </a:rPr>
-              <a:t>vibration_rms et temperature_motor : variables les plus correlees a la panne.</a:t>
+              <a:t>La vibration et la temperature moteur sont les deux signaux les plus revelateurs d'une panne imminente.</a:t>
             </a:r>
           </a:p>
           <a:p>
@@ -4902,7 +4902,7 @@
                 </a:solidFill>
                 <a:latin typeface="Gilroy"/>
               </a:rPr>
-              <a:t>Coherence physique  </a:t>
+              <a:t>Explication  </a:t>
             </a:r>
             <a:r>
               <a:rPr sz="1400" b="0" i="0">
@@ -4911,7 +4911,7 @@
                 </a:solidFill>
                 <a:latin typeface="Calibri"/>
               </a:rPr>
-              <a:t>l'usure mecanique genere vibration ET echauffement simultanement.</a:t>
+              <a:t>L'usure mecanique chauffe ET fait vibrer la machine en meme temps : deux alarmes qui se confirment mutuellement.</a:t>
             </a:r>
           </a:p>
           <a:p>
@@ -4939,7 +4939,7 @@
                 </a:solidFill>
                 <a:latin typeface="Gilroy"/>
               </a:rPr>
-              <a:t>EDA  </a:t>
+              <a:t>Analyse  </a:t>
             </a:r>
             <a:r>
               <a:rPr sz="1400" b="0" i="0">
@@ -4948,7 +4948,7 @@
                 </a:solidFill>
                 <a:latin typeface="Calibri"/>
               </a:rPr>
-              <a:t>6 etapes : distributions, boxplots outliers, heatmap correlations, desequilibre 85.2/14.8 % (20 484 normales / 3 558 pannes), scatter vibration x temperature, tendances temporelles.</a:t>
+              <a:t>6 etapes : repartition des valeurs, valeurs extremes, correlations, equilibre 85/15 %, tendances dans le temps.</a:t>
             </a:r>
           </a:p>
         </p:txBody>
@@ -6982,7 +6982,7 @@
                 </a:solidFill>
                 <a:latin typeface="Gilroy"/>
               </a:rPr>
-              <a:t>Selection  </a:t>
+              <a:t>Critere de selection  </a:t>
             </a:r>
             <a:r>
               <a:rPr sz="1250" b="0" i="0">
@@ -6991,7 +6991,7 @@
                 </a:solidFill>
                 <a:latin typeface="Calibri"/>
               </a:rPr>
-              <a:t>score = F1 - 0.5 x sigma(F1 en cross-val) -&gt; performance ET stabilite.</a:t>
+              <a:t>Le meilleur modele est le plus performant ET le plus stable sur de nouvelles donnees (F1 penalise par sa variabilite).</a:t>
             </a:r>
           </a:p>
           <a:p>
@@ -7019,7 +7019,7 @@
                 </a:solidFill>
                 <a:latin typeface="Gilroy"/>
               </a:rPr>
-              <a:t>Anti-leakage  </a:t>
+              <a:t>Integrite  </a:t>
             </a:r>
             <a:r>
               <a:rPr sz="1250" b="0" i="0">
@@ -7028,7 +7028,7 @@
                 </a:solidFill>
                 <a:latin typeface="Calibri"/>
               </a:rPr>
-              <a:t>pipeline sklearn fit sur train uniquement (ADR dedie).</a:t>
+              <a:t>Le modele n'a jamais vu les donnees de test pendant l'entrainement (garantit une evaluation honnete).</a:t>
             </a:r>
           </a:p>
           <a:p>
@@ -7056,7 +7056,7 @@
                 </a:solidFill>
                 <a:latin typeface="Gilroy"/>
               </a:rPr>
-              <a:t>CV 5-fold  </a:t>
+              <a:t>Validation croisee  </a:t>
             </a:r>
             <a:r>
               <a:rPr sz="1250" b="0" i="0">
@@ -7065,7 +7065,7 @@
                 </a:solidFill>
                 <a:latin typeface="Calibri"/>
               </a:rPr>
-              <a:t>XGBoost F1=0.886+/-0.011 stable, selection score = F1 - 0.5xsigma(CV).</a:t>
+              <a:t>XGBoost teste 5 fois sur des jeux differents : F1=0.886 +/- 0.011 -&gt; generalise bien.</a:t>
             </a:r>
           </a:p>
         </p:txBody>
@@ -7608,7 +7608,7 @@
                 </a:solidFill>
                 <a:latin typeface="Gilroy"/>
               </a:rPr>
-              <a:t>Cible  </a:t>
+              <a:t>Concu pour  </a:t>
             </a:r>
             <a:r>
               <a:rPr sz="1350" b="0" i="0">
@@ -7617,7 +7617,7 @@
                 </a:solidFill>
                 <a:latin typeface="Calibri"/>
               </a:rPr>
-              <a:t>responsable maintenance, pas le data scientist.</a:t>
+              <a:t>le responsable maintenance, pas l'expert en IA : interface simple, lisible, actionnable.</a:t>
             </a:r>
           </a:p>
           <a:p>
@@ -7654,7 +7654,7 @@
                 </a:solidFill>
                 <a:latin typeface="Calibri"/>
               </a:rPr>
-              <a:t>sliders capteurs -&gt; prediction temps reel + probabilite.</a:t>
+              <a:t>Bougez les curseurs (vibration, temperature...) : la prediction se met a jour en temps reel.</a:t>
             </a:r>
           </a:p>
           <a:p>
@@ -7691,7 +7691,7 @@
                 </a:solidFill>
                 <a:latin typeface="Calibri"/>
               </a:rPr>
-              <a:t>top variables influentes en langage metier.</a:t>
+              <a:t>Quelles mesures ont declanche l'alerte ? Affiche en langage metier, sans jargon technique.</a:t>
             </a:r>
           </a:p>
           <a:p>
@@ -7728,7 +7728,7 @@
                 </a:solidFill>
                 <a:latin typeface="Calibri"/>
               </a:rPr>
-              <a:t>des visuels EDA du rapport (consigne du sujet).</a:t>
+              <a:t>Outil d'aide a la decision separe des graphiques d'analyse du rapport.</a:t>
             </a:r>
           </a:p>
         </p:txBody>
@@ -7767,7 +7767,7 @@
                 </a:solidFill>
                 <a:latin typeface="Calibri"/>
               </a:rPr>
-              <a:t>Scenario : vibration haute + temperature haute -&gt; risque eleve -&gt; feature importance.</a:t>
+              <a:t>Demo : vibration elevee + moteur chaud -&gt; alerte rouge -&gt; l'IA explique pourquoi.</a:t>
             </a:r>
           </a:p>
         </p:txBody>
@@ -9143,7 +9143,7 @@
                 </a:solidFill>
                 <a:latin typeface="Calibri"/>
               </a:rPr>
-              <a:t>recommander un cocktail depuis une envie en langage naturel.</a:t>
+              <a:t>Trouver un cocktail depuis une envie exprimee en mots naturels : « quelque chose de frais ».</a:t>
             </a:r>
           </a:p>
           <a:p>
@@ -9171,7 +9171,7 @@
                 </a:solidFill>
                 <a:latin typeface="Gilroy"/>
               </a:rPr>
-              <a:t>Pourquoi GenAI  </a:t>
+              <a:t>Pourquoi l'IA  </a:t>
             </a:r>
             <a:r>
               <a:rPr sz="1400" b="0" i="0">
@@ -9180,7 +9180,7 @@
                 </a:solidFill>
                 <a:latin typeface="Calibri"/>
               </a:rPr>
-              <a:t>les filtres echouent sur « frais, fruite, touche tropicale ».</a:t>
+              <a:t>Une recherche par mots-cles echoue sur « fruite et tropical » : l'IA comprend l'intention.</a:t>
             </a:r>
           </a:p>
           <a:p>
@@ -9208,7 +9208,7 @@
                 </a:solidFill>
                 <a:latin typeface="Gilroy"/>
               </a:rPr>
-              <a:t>Comprendre + produire  </a:t>
+              <a:t>Deux etapes  </a:t>
             </a:r>
             <a:r>
               <a:rPr sz="1400" b="0" i="0">
@@ -9217,7 +9217,7 @@
                 </a:solidFill>
                 <a:latin typeface="Calibri"/>
               </a:rPr>
-              <a:t>semantique (retrieval) ET generation (recette personnalisee).</a:t>
+              <a:t>Comprendre la requete (recherche semantique) PUIS creer une recette sur mesure (generation).</a:t>
             </a:r>
           </a:p>
           <a:p>
@@ -9245,7 +9245,7 @@
                 </a:solidFill>
                 <a:latin typeface="Gilroy"/>
               </a:rPr>
-              <a:t>Conformite  </a:t>
+              <a:t>Cadre  </a:t>
             </a:r>
             <a:r>
               <a:rPr sz="1400" b="0" i="0">
@@ -9254,7 +9254,7 @@
                 </a:solidFill>
                 <a:latin typeface="Calibri"/>
               </a:rPr>
-              <a:t>thematique alternative validee par l'Annexe I du sujet.</a:t>
+              <a:t>Thematique alternative validee par l'EFREI (Annexe I du sujet), couvre C5.1-C5.3.</a:t>
             </a:r>
           </a:p>
         </p:txBody>
@@ -9332,7 +9332,7 @@
                 </a:solidFill>
                 <a:latin typeface="Calibri"/>
               </a:rPr>
-              <a:t>Requete -&gt; guardrail SBERT cosinus 0.40 (calibre 30 requetes) -&gt; cache JSON MD5 -&gt; retrieval SBERT + generation GPT-2</a:t>
+              <a:t>Votre requete est verifee (hors-sujet = refus poli) &gt; consultee en cache si connue &gt; sinon : recherche + generation</a:t>
             </a:r>
           </a:p>
         </p:txBody>
@@ -9984,7 +9984,7 @@
                 </a:solidFill>
                 <a:latin typeface="Gilroy"/>
               </a:rPr>
-              <a:t>SBERT all-MiniLM-L6-v2  </a:t>
+              <a:t>Comprehension semantique  </a:t>
             </a:r>
             <a:r>
               <a:rPr sz="1350" b="0" i="0">
@@ -9993,7 +9993,7 @@
                 </a:solidFill>
                 <a:latin typeface="Calibri"/>
               </a:rPr>
-              <a:t>local, 80 MB, 384 dims. Choix vs TF-IDF : capture la semantique (« frais et fruite » trouve rhum-agrumes, TF-IDF echoue). CPU-only, adapte au domaine clos 600 cocktails.</a:t>
+              <a:t>Le moteur comprend le sens, pas les mots exacts (« frais et fruite » = rhum-agrumes). Fonctionne 100 % en local, sans internet.</a:t>
             </a:r>
           </a:p>
           <a:p>
@@ -10021,7 +10021,7 @@
                 </a:solidFill>
                 <a:latin typeface="Gilroy"/>
               </a:rPr>
-              <a:t>GPT-2 fine-tune  </a:t>
+              <a:t>Generateur de recettes  </a:t>
             </a:r>
             <a:r>
               <a:rPr sz="1350" b="0" i="0">
@@ -10030,7 +10030,7 @@
                 </a:solidFill>
                 <a:latin typeface="Calibri"/>
               </a:rPr>
-              <a:t>generation locale, 117M params, 3 epochs sur corpus cocktails. Fallback template si modele absent. Bornee par contexte RAG retrieved.</a:t>
+              <a:t>IA specialisee sur cocktails cree une recette sur mesure. Repli sur un modele de secours si l'IA principale est absente.</a:t>
             </a:r>
           </a:p>
           <a:p>
@@ -10058,7 +10058,7 @@
                 </a:solidFill>
                 <a:latin typeface="Gilroy"/>
               </a:rPr>
-              <a:t>Cache JSON MD5  </a:t>
+              <a:t>Memoire intelligente  </a:t>
             </a:r>
             <a:r>
               <a:rPr sz="1350" b="0" i="0">
@@ -10067,7 +10067,7 @@
                 </a:solidFill>
                 <a:latin typeface="Calibri"/>
               </a:rPr>
-              <a:t>1 generation par requete unique. Latence cache hit &lt; 100 ms vs ~3 s premiere generation GPT-2.</a:t>
+              <a:t>Les requetes deja posees sont mises en cache : reponse instantanee (&lt; 100 ms) au lieu de ~3 secondes.</a:t>
             </a:r>
           </a:p>
           <a:p>
@@ -10095,7 +10095,7 @@
                 </a:solidFill>
                 <a:latin typeface="Gilroy"/>
               </a:rPr>
-              <a:t>Guardrail SBERT cosinus  </a:t>
+              <a:t>Filtre anti-detournement  </a:t>
             </a:r>
             <a:r>
               <a:rPr sz="1350" b="0" i="0">
@@ -10104,7 +10104,7 @@
                 </a:solidFill>
                 <a:latin typeface="Calibri"/>
               </a:rPr>
-              <a:t>Seuil 0.40 calibre sur 30 requetes labelisees. Refusal rate 100 % apres calibration (vs 86.7 % avant).</a:t>
+              <a:t>Calibre sur 30 tests : 100 % des requetes hors-sujet (« repare mon velo ») sont refusees poliment.</a:t>
             </a:r>
           </a:p>
         </p:txBody>
@@ -10143,7 +10143,7 @@
                 </a:solidFill>
                 <a:latin typeface="Calibri"/>
               </a:rPr>
-              <a:t>Scenario : « quelque chose de frais et fruite » -&gt; Top-5 SBERT + radar ; « repare mon velo » -&gt; refus (score &lt; 0.40, out_of_domain_filtered).</a:t>
+              <a:t>Demo : « quelque chose de frais et fruite » -&gt; 5 cocktails + radar de saveurs ; « repare mon velo » -&gt; refus poli (hors sujet cocktails).</a:t>
             </a:r>
           </a:p>
         </p:txBody>
@@ -10699,7 +10699,7 @@
                 </a:solidFill>
                 <a:latin typeface="Gilroy"/>
               </a:rPr>
-              <a:t>Refusal rate 100 %  </a:t>
+              <a:t>Filtre hors-sujet : 100 %  </a:t>
             </a:r>
             <a:r>
               <a:rPr sz="1400" b="0" i="0">
@@ -10708,7 +10708,7 @@
                 </a:solidFill>
                 <a:latin typeface="Calibri"/>
               </a:rPr>
-              <a:t>15/15 requetes hors-domaine rejetees apres calibration du guardrail. Avant : 86.7% (13/15). Delta +13.3%.</a:t>
+              <a:t>Apres calibration : 15/15 requetes inappropriees refusees (vs 13/15 avant). Zero fuite hors-sujet.</a:t>
             </a:r>
           </a:p>
           <a:p>
@@ -10736,7 +10736,7 @@
                 </a:solidFill>
                 <a:latin typeface="Gilroy"/>
               </a:rPr>
-              <a:t>hit@5 = 91.3 %  </a:t>
+              <a:t>Pertinence : hit@5 = 91.3 %  </a:t>
             </a:r>
             <a:r>
               <a:rPr sz="1400" b="0" i="0">
@@ -10745,7 +10745,7 @@
                 </a:solidFill>
                 <a:latin typeface="Calibri"/>
               </a:rPr>
-              <a:t>21/23 requetes in-domain avec au moins 1 resultat pertinent dans le Top-5 (SBERT cosinus sur 1280 cocktails).</a:t>
+              <a:t>21 requetes sur 23 ont trouve au moins 1 cocktail pertinent dans les 5 premiers resultats proposes.</a:t>
             </a:r>
           </a:p>
           <a:p>
@@ -10773,7 +10773,7 @@
                 </a:solidFill>
                 <a:latin typeface="Gilroy"/>
               </a:rPr>
-              <a:t>Retrieval P@1=90 %  </a:t>
+              <a:t>Precision : P@1 = 90 %  </a:t>
             </a:r>
             <a:r>
               <a:rPr sz="1400" b="0" i="0">
@@ -10782,7 +10782,7 @@
                 </a:solidFill>
                 <a:latin typeface="Calibri"/>
               </a:rPr>
-              <a:t>NDCG@3,5,10 = 0.963. Evalue sur 23 requetes in-domain + 15 OOD = 38 requetes labelisees au total.</a:t>
+              <a:t>Le premier cocktail propose est pertinent 9 fois sur 10. Evalue sur 38 requetes labelisees.</a:t>
             </a:r>
           </a:p>
           <a:p>
@@ -10819,7 +10819,7 @@
                 </a:solidFill>
                 <a:latin typeface="Calibri"/>
               </a:rPr>
-              <a:t>FAISS persistant pour scale 100k+, fine-tuning SBERT domaine cocktails, LaBSE pour queries FR/EN/ES.</a:t>
+              <a:t>Indexation vectorielle (FAISS) pour 100k+ cocktails, support FR/EN/ES, fine-tuning domaine cocktails.</a:t>
             </a:r>
           </a:p>
         </p:txBody>
@@ -10943,7 +10943,7 @@
                 </a:solidFill>
                 <a:latin typeface="Calibri"/>
               </a:rPr>
-              <a:t>Hallucination (mitigee RAG+cache)  |  requetes FR : -15% perf vs EN  |  biais dataset anglophone  |  usage responsable de l'alcool.</a:t>
+              <a:t>Inventions de l'IA mitigees par le cache et la recherche  |  en francais : -15 % precision vs anglais  |  dataset majoritairement anglophone  |  usage responsable de l'alcool.</a:t>
             </a:r>
           </a:p>
         </p:txBody>
@@ -14111,7 +14111,7 @@
                 </a:solidFill>
                 <a:latin typeface="Calibri"/>
               </a:rPr>
-              <a:t>SBERT + RAG Gemini</a:t>
+              <a:t>SBERT + RAG GPT-2</a:t>
             </a:r>
           </a:p>
         </p:txBody>
@@ -18822,7 +18822,7 @@
                 </a:solidFill>
                 <a:latin typeface="Calibri"/>
               </a:rPr>
-              <a:t>Plateforme data du logement parisien. 82 sources Open Data (4 familles), architecture medaillon, PostgreSQL datamarts Gold, Cassandra, Kafka, API FastAPI securisee, dashboard MapLibre.</a:t>
+              <a:t>Exploration du marche immobilier parisien : 82 sources publiques collectees, nettoyees et visualisees sur une carte interactive. Chaque arrondissement analysable en temps reel.</a:t>
             </a:r>
           </a:p>
         </p:txBody>
@@ -19086,7 +19086,7 @@
                 </a:solidFill>
                 <a:latin typeface="Calibri"/>
               </a:rPr>
-              <a:t>Prediction de panne machine sous 24 h depuis capteurs IoT. 4 modeles (dont Deep Learning), XGBoost retenu F1=0.886 ROC-AUC=0.995, dashboard decisionnel Streamlit.</a:t>
+              <a:t>Anticiper les pannes de machines industrielles avant qu'elles surviennent. L'IA detecte 9 pannes sur 10 avec 24h d'avance. Passer de 100 EUR/h corrective a 20 EUR/h preventive.</a:t>
             </a:r>
           </a:p>
         </p:txBody>
@@ -19350,7 +19350,7 @@
                 </a:solidFill>
                 <a:latin typeface="Calibri"/>
               </a:rPr>
-              <a:t>Recommandation de cocktails par IA semantique. 1280 cocktails (4 sources fusionnees), SBERT all-MiniLM-L6-v2 384 dims, guardrail cosinus 0.40 (calibre 30 requetes), RAG + GPT-2 fine-tune, cache JSON MD5.</a:t>
+              <a:t>Dites « quelque chose de frais » et l'IA recommande un cocktail et cree la recette. 1280 cocktails, comprehension du langage naturel, refus automatique des requetes hors-sujet.</a:t>
             </a:r>
           </a:p>
         </p:txBody>
@@ -20365,7 +20365,7 @@
                 </a:solidFill>
                 <a:latin typeface="Calibri"/>
               </a:rPr>
-              <a:t>Backend RAG/SBERT, guardrail semantique, cache SQLite MD5, evaluation</a:t>
+              <a:t>Backend RAG/SBERT, guardrail semantique, cache JSON MD5, evaluation</a:t>
             </a:r>
           </a:p>
         </p:txBody>
@@ -20824,7 +20824,7 @@
                 </a:solidFill>
                 <a:latin typeface="Gilroy"/>
               </a:rPr>
-              <a:t>Besoin metier  </a:t>
+              <a:t>Besoin  </a:t>
             </a:r>
             <a:r>
               <a:rPr sz="1400" b="0" i="0">
@@ -20833,7 +20833,7 @@
                 </a:solidFill>
                 <a:latin typeface="Calibri"/>
               </a:rPr>
-              <a:t>explorer le marche du logement parisien en croisant 82 sources Open Data (4 familles) heterogenes.</a:t>
+              <a:t>Explorer le marche du logement parisien en croisant 82 sources publiques (prix, transports, logement social, environnement).</a:t>
             </a:r>
           </a:p>
           <a:p>
@@ -20861,7 +20861,7 @@
                 </a:solidFill>
                 <a:latin typeface="Gilroy"/>
               </a:rPr>
-              <a:t>Architecture medaillon  </a:t>
+              <a:t>Pipeline en 3 etapes  </a:t>
             </a:r>
             <a:r>
               <a:rPr sz="1400" b="0" i="0">
@@ -20870,7 +20870,7 @@
                 </a:solidFill>
                 <a:latin typeface="Calibri"/>
               </a:rPr>
-              <a:t>Bronze (brut Parquet) -&gt; Silver (normalise, geocode) -&gt; Gold (datamarts).</a:t>
+              <a:t>Donnees brutes &gt; nettoyees + geocodees &gt; analyses pret-a-l'emploi (architecture Bronze-Silver-Gold).</a:t>
             </a:r>
           </a:p>
           <a:p>
@@ -20898,7 +20898,7 @@
                 </a:solidFill>
                 <a:latin typeface="Gilroy"/>
               </a:rPr>
-              <a:t>Stockage dual  </a:t>
+              <a:t>Double stockage  </a:t>
             </a:r>
             <a:r>
               <a:rPr sz="1400" b="0" i="0">
@@ -20907,7 +20907,7 @@
                 </a:solidFill>
                 <a:latin typeface="Calibri"/>
               </a:rPr>
-              <a:t>PostgreSQL Gold datamarts (schema applatit oriente requetes), Cassandra query-first pour le streaming.</a:t>
+              <a:t>PostgreSQL pour les analyses historiques, Cassandra pour les flux en temps reel (Kafka).</a:t>
             </a:r>
           </a:p>
           <a:p>
@@ -20935,7 +20935,7 @@
                 </a:solidFill>
                 <a:latin typeface="Gilroy"/>
               </a:rPr>
-              <a:t>Exposition  </a:t>
+              <a:t>Interface  </a:t>
             </a:r>
             <a:r>
               <a:rPr sz="1400" b="0" i="0">
@@ -20944,7 +20944,7 @@
                 </a:solidFill>
                 <a:latin typeface="Calibri"/>
               </a:rPr>
-              <a:t>API FastAPI securisee -&gt; dashboard React / MapLibre.</a:t>
+              <a:t>API securisee alimente un tableau de bord cartographique interactif par arrondissement.</a:t>
             </a:r>
           </a:p>
         </p:txBody>
